--- a/pictures/ShedderUseCase.pptx
+++ b/pictures/ShedderUseCase.pptx
@@ -11,7 +11,7 @@
     <p:sldId id="259" r:id="rId5"/>
   </p:sldIdLst>
   <p:sldSz cx="12192000" cy="6858000"/>
-  <p:notesSz cx="6858000" cy="9144000"/>
+  <p:notesSz cx="7315200" cy="9601200"/>
   <p:defaultTextStyle>
     <a:defPPr>
       <a:defRPr lang="en-SE"/>
@@ -107,7 +107,510 @@
       </a:defRPr>
     </a:lvl9pPr>
   </p:defaultTextStyle>
+  <p:extLst>
+    <p:ext uri="{EFAFB233-063F-42B5-8137-9DF3F51BA10A}">
+      <p15:sldGuideLst xmlns:p15="http://schemas.microsoft.com/office/powerpoint/2012/main"/>
+    </p:ext>
+  </p:extLst>
 </p:presentation>
+</file>
+
+<file path=ppt/revisionInfo.xml><?xml version="1.0" encoding="utf-8"?>
+<p1510:revInfo xmlns:a="http://schemas.openxmlformats.org/drawingml/2006/main" xmlns:r="http://schemas.openxmlformats.org/officeDocument/2006/relationships" xmlns:p1510="http://schemas.microsoft.com/office/powerpoint/2015/10/main">
+  <p1510:revLst>
+    <p1510:client id="{0B093F69-D5D1-4471-843B-3B834C2703E5}" v="121" dt="2026-03-20T11:17:24.353"/>
+  </p1510:revLst>
+</p1510:revInfo>
+</file>
+
+<file path=ppt/changesInfos/changesInfo1.xml><?xml version="1.0" encoding="utf-8"?>
+<pc:chgInfo xmlns:a="http://schemas.openxmlformats.org/drawingml/2006/main" xmlns:r="http://schemas.openxmlformats.org/officeDocument/2006/relationships" xmlns:ac="http://schemas.microsoft.com/office/drawing/2013/main/command" xmlns:pc="http://schemas.microsoft.com/office/powerpoint/2013/main/command">
+  <pc:docChgLst>
+    <pc:chgData name="Jonas Bjurel" userId="05f6ddf6-7be8-452a-8077-00a16bc7f7a5" providerId="ADAL" clId="{8FC618C2-55AC-4C6F-AD04-AE0682A0F0D3}"/>
+    <pc:docChg chg="undo custSel addSld delSld modSld sldOrd">
+      <pc:chgData name="Jonas Bjurel" userId="05f6ddf6-7be8-452a-8077-00a16bc7f7a5" providerId="ADAL" clId="{8FC618C2-55AC-4C6F-AD04-AE0682A0F0D3}" dt="2026-03-20T11:18:20.872" v="209" actId="2696"/>
+      <pc:docMkLst>
+        <pc:docMk/>
+      </pc:docMkLst>
+      <pc:sldChg chg="addSp delSp modSp mod ord">
+        <pc:chgData name="Jonas Bjurel" userId="05f6ddf6-7be8-452a-8077-00a16bc7f7a5" providerId="ADAL" clId="{8FC618C2-55AC-4C6F-AD04-AE0682A0F0D3}" dt="2026-03-19T20:51:40.247" v="177"/>
+        <pc:sldMkLst>
+          <pc:docMk/>
+          <pc:sldMk cId="2016711445" sldId="257"/>
+        </pc:sldMkLst>
+        <pc:spChg chg="add mod">
+          <ac:chgData name="Jonas Bjurel" userId="05f6ddf6-7be8-452a-8077-00a16bc7f7a5" providerId="ADAL" clId="{8FC618C2-55AC-4C6F-AD04-AE0682A0F0D3}" dt="2026-03-19T19:50:48.061" v="104" actId="1036"/>
+          <ac:spMkLst>
+            <pc:docMk/>
+            <pc:sldMk cId="2016711445" sldId="257"/>
+            <ac:spMk id="7" creationId="{937F355D-5ACB-79FB-CF32-966E4C3E2CC4}"/>
+          </ac:spMkLst>
+        </pc:spChg>
+        <pc:spChg chg="add mod">
+          <ac:chgData name="Jonas Bjurel" userId="05f6ddf6-7be8-452a-8077-00a16bc7f7a5" providerId="ADAL" clId="{8FC618C2-55AC-4C6F-AD04-AE0682A0F0D3}" dt="2026-03-19T19:50:57.319" v="107" actId="1037"/>
+          <ac:spMkLst>
+            <pc:docMk/>
+            <pc:sldMk cId="2016711445" sldId="257"/>
+            <ac:spMk id="14" creationId="{4FD66D4D-6766-3D74-4F5E-D415216DA7C5}"/>
+          </ac:spMkLst>
+        </pc:spChg>
+        <pc:spChg chg="add del">
+          <ac:chgData name="Jonas Bjurel" userId="05f6ddf6-7be8-452a-8077-00a16bc7f7a5" providerId="ADAL" clId="{8FC618C2-55AC-4C6F-AD04-AE0682A0F0D3}" dt="2026-03-19T19:48:56.891" v="93" actId="22"/>
+          <ac:spMkLst>
+            <pc:docMk/>
+            <pc:sldMk cId="2016711445" sldId="257"/>
+            <ac:spMk id="24" creationId="{2B37EE93-AAF3-7B10-017E-DF6909112003}"/>
+          </ac:spMkLst>
+        </pc:spChg>
+        <pc:grpChg chg="add del mod">
+          <ac:chgData name="Jonas Bjurel" userId="05f6ddf6-7be8-452a-8077-00a16bc7f7a5" providerId="ADAL" clId="{8FC618C2-55AC-4C6F-AD04-AE0682A0F0D3}" dt="2026-03-19T19:50:48.061" v="104" actId="1036"/>
+          <ac:grpSpMkLst>
+            <pc:docMk/>
+            <pc:sldMk cId="2016711445" sldId="257"/>
+            <ac:grpSpMk id="11" creationId="{98248B6C-B144-A84B-EF7C-4997F1DEA078}"/>
+          </ac:grpSpMkLst>
+        </pc:grpChg>
+        <pc:grpChg chg="add mod">
+          <ac:chgData name="Jonas Bjurel" userId="05f6ddf6-7be8-452a-8077-00a16bc7f7a5" providerId="ADAL" clId="{8FC618C2-55AC-4C6F-AD04-AE0682A0F0D3}" dt="2026-03-19T19:50:57.319" v="107" actId="1037"/>
+          <ac:grpSpMkLst>
+            <pc:docMk/>
+            <pc:sldMk cId="2016711445" sldId="257"/>
+            <ac:grpSpMk id="16" creationId="{19E72DC1-E7E2-A91B-2D18-45564056A3D2}"/>
+          </ac:grpSpMkLst>
+        </pc:grpChg>
+        <pc:picChg chg="add mod">
+          <ac:chgData name="Jonas Bjurel" userId="05f6ddf6-7be8-452a-8077-00a16bc7f7a5" providerId="ADAL" clId="{8FC618C2-55AC-4C6F-AD04-AE0682A0F0D3}" dt="2026-03-19T19:50:48.061" v="104" actId="1036"/>
+          <ac:picMkLst>
+            <pc:docMk/>
+            <pc:sldMk cId="2016711445" sldId="257"/>
+            <ac:picMk id="5" creationId="{362AD73B-A2C0-40FF-43EA-64FF4F5D28FD}"/>
+          </ac:picMkLst>
+        </pc:picChg>
+        <pc:picChg chg="add del mod">
+          <ac:chgData name="Jonas Bjurel" userId="05f6ddf6-7be8-452a-8077-00a16bc7f7a5" providerId="ADAL" clId="{8FC618C2-55AC-4C6F-AD04-AE0682A0F0D3}" dt="2026-03-19T19:50:57.319" v="107" actId="1037"/>
+          <ac:picMkLst>
+            <pc:docMk/>
+            <pc:sldMk cId="2016711445" sldId="257"/>
+            <ac:picMk id="13" creationId="{8FD0DADB-6CC1-0420-F72A-E3D6C79CCFED}"/>
+          </ac:picMkLst>
+        </pc:picChg>
+        <pc:picChg chg="add mod">
+          <ac:chgData name="Jonas Bjurel" userId="05f6ddf6-7be8-452a-8077-00a16bc7f7a5" providerId="ADAL" clId="{8FC618C2-55AC-4C6F-AD04-AE0682A0F0D3}" dt="2026-03-19T19:50:34.872" v="99" actId="1076"/>
+          <ac:picMkLst>
+            <pc:docMk/>
+            <pc:sldMk cId="2016711445" sldId="257"/>
+            <ac:picMk id="31" creationId="{B2FC8676-AE21-1D01-7AF8-6562DBB8C3ED}"/>
+          </ac:picMkLst>
+        </pc:picChg>
+        <pc:picChg chg="add">
+          <ac:chgData name="Jonas Bjurel" userId="05f6ddf6-7be8-452a-8077-00a16bc7f7a5" providerId="ADAL" clId="{8FC618C2-55AC-4C6F-AD04-AE0682A0F0D3}" dt="2026-03-19T19:41:03.380" v="45"/>
+          <ac:picMkLst>
+            <pc:docMk/>
+            <pc:sldMk cId="2016711445" sldId="257"/>
+            <ac:picMk id="1026" creationId="{942CF381-0252-FF5B-7479-34B7FBE6C32A}"/>
+          </ac:picMkLst>
+        </pc:picChg>
+        <pc:picChg chg="mod">
+          <ac:chgData name="Jonas Bjurel" userId="05f6ddf6-7be8-452a-8077-00a16bc7f7a5" providerId="ADAL" clId="{8FC618C2-55AC-4C6F-AD04-AE0682A0F0D3}" dt="2026-03-19T19:41:37.888" v="57" actId="1076"/>
+          <ac:picMkLst>
+            <pc:docMk/>
+            <pc:sldMk cId="2016711445" sldId="257"/>
+            <ac:picMk id="1064" creationId="{18792796-C82B-6CA3-5C39-1CCF0364CDA5}"/>
+          </ac:picMkLst>
+        </pc:picChg>
+        <pc:picChg chg="mod">
+          <ac:chgData name="Jonas Bjurel" userId="05f6ddf6-7be8-452a-8077-00a16bc7f7a5" providerId="ADAL" clId="{8FC618C2-55AC-4C6F-AD04-AE0682A0F0D3}" dt="2026-03-19T19:51:47.288" v="120" actId="1036"/>
+          <ac:picMkLst>
+            <pc:docMk/>
+            <pc:sldMk cId="2016711445" sldId="257"/>
+            <ac:picMk id="1066" creationId="{AA6EC4F9-F800-870F-BD0B-8D00C73AA884}"/>
+          </ac:picMkLst>
+        </pc:picChg>
+        <pc:cxnChg chg="mod">
+          <ac:chgData name="Jonas Bjurel" userId="05f6ddf6-7be8-452a-8077-00a16bc7f7a5" providerId="ADAL" clId="{8FC618C2-55AC-4C6F-AD04-AE0682A0F0D3}" dt="2026-03-19T19:47:42.901" v="91" actId="1037"/>
+          <ac:cxnSpMkLst>
+            <pc:docMk/>
+            <pc:sldMk cId="2016711445" sldId="257"/>
+            <ac:cxnSpMk id="1071" creationId="{06FAD586-9308-96A1-F177-1931DC7F115A}"/>
+          </ac:cxnSpMkLst>
+        </pc:cxnChg>
+      </pc:sldChg>
+      <pc:sldChg chg="addSp modSp mod">
+        <pc:chgData name="Jonas Bjurel" userId="05f6ddf6-7be8-452a-8077-00a16bc7f7a5" providerId="ADAL" clId="{8FC618C2-55AC-4C6F-AD04-AE0682A0F0D3}" dt="2026-03-19T20:43:51.870" v="167" actId="14100"/>
+        <pc:sldMkLst>
+          <pc:docMk/>
+          <pc:sldMk cId="4167088281" sldId="258"/>
+        </pc:sldMkLst>
+        <pc:spChg chg="mod">
+          <ac:chgData name="Jonas Bjurel" userId="05f6ddf6-7be8-452a-8077-00a16bc7f7a5" providerId="ADAL" clId="{8FC618C2-55AC-4C6F-AD04-AE0682A0F0D3}" dt="2026-03-19T20:42:45.053" v="157"/>
+          <ac:spMkLst>
+            <pc:docMk/>
+            <pc:sldMk cId="4167088281" sldId="258"/>
+            <ac:spMk id="26" creationId="{391BBB9E-0AA6-5B60-9B6E-75C72D3436AA}"/>
+          </ac:spMkLst>
+        </pc:spChg>
+        <pc:spChg chg="mod">
+          <ac:chgData name="Jonas Bjurel" userId="05f6ddf6-7be8-452a-8077-00a16bc7f7a5" providerId="ADAL" clId="{8FC618C2-55AC-4C6F-AD04-AE0682A0F0D3}" dt="2026-03-19T20:42:45.053" v="157"/>
+          <ac:spMkLst>
+            <pc:docMk/>
+            <pc:sldMk cId="4167088281" sldId="258"/>
+            <ac:spMk id="32" creationId="{7567CF10-B151-7AF0-709B-C120867E6003}"/>
+          </ac:spMkLst>
+        </pc:spChg>
+        <pc:grpChg chg="add mod">
+          <ac:chgData name="Jonas Bjurel" userId="05f6ddf6-7be8-452a-8077-00a16bc7f7a5" providerId="ADAL" clId="{8FC618C2-55AC-4C6F-AD04-AE0682A0F0D3}" dt="2026-03-19T20:42:45.053" v="157"/>
+          <ac:grpSpMkLst>
+            <pc:docMk/>
+            <pc:sldMk cId="4167088281" sldId="258"/>
+            <ac:grpSpMk id="24" creationId="{877F12AF-56BB-F0C4-FD12-D546204A2561}"/>
+          </ac:grpSpMkLst>
+        </pc:grpChg>
+        <pc:grpChg chg="add mod">
+          <ac:chgData name="Jonas Bjurel" userId="05f6ddf6-7be8-452a-8077-00a16bc7f7a5" providerId="ADAL" clId="{8FC618C2-55AC-4C6F-AD04-AE0682A0F0D3}" dt="2026-03-19T20:42:45.053" v="157"/>
+          <ac:grpSpMkLst>
+            <pc:docMk/>
+            <pc:sldMk cId="4167088281" sldId="258"/>
+            <ac:grpSpMk id="27" creationId="{6799E508-0BCE-2C6D-CC0C-32CAF2D370D8}"/>
+          </ac:grpSpMkLst>
+        </pc:grpChg>
+        <pc:picChg chg="add mod">
+          <ac:chgData name="Jonas Bjurel" userId="05f6ddf6-7be8-452a-8077-00a16bc7f7a5" providerId="ADAL" clId="{8FC618C2-55AC-4C6F-AD04-AE0682A0F0D3}" dt="2026-03-19T20:42:51.213" v="159" actId="1076"/>
+          <ac:picMkLst>
+            <pc:docMk/>
+            <pc:sldMk cId="4167088281" sldId="258"/>
+            <ac:picMk id="23" creationId="{51F5BD3C-D1DA-45C8-0C17-8FE5F92DF44B}"/>
+          </ac:picMkLst>
+        </pc:picChg>
+        <pc:picChg chg="mod">
+          <ac:chgData name="Jonas Bjurel" userId="05f6ddf6-7be8-452a-8077-00a16bc7f7a5" providerId="ADAL" clId="{8FC618C2-55AC-4C6F-AD04-AE0682A0F0D3}" dt="2026-03-19T20:42:45.053" v="157"/>
+          <ac:picMkLst>
+            <pc:docMk/>
+            <pc:sldMk cId="4167088281" sldId="258"/>
+            <ac:picMk id="25" creationId="{78048A26-6175-94E2-945E-5BF81982EC40}"/>
+          </ac:picMkLst>
+        </pc:picChg>
+        <pc:picChg chg="mod">
+          <ac:chgData name="Jonas Bjurel" userId="05f6ddf6-7be8-452a-8077-00a16bc7f7a5" providerId="ADAL" clId="{8FC618C2-55AC-4C6F-AD04-AE0682A0F0D3}" dt="2026-03-19T20:42:45.053" v="157"/>
+          <ac:picMkLst>
+            <pc:docMk/>
+            <pc:sldMk cId="4167088281" sldId="258"/>
+            <ac:picMk id="31" creationId="{528FC521-98B1-F9CD-DBBA-8263685754B2}"/>
+          </ac:picMkLst>
+        </pc:picChg>
+        <pc:picChg chg="add mod">
+          <ac:chgData name="Jonas Bjurel" userId="05f6ddf6-7be8-452a-8077-00a16bc7f7a5" providerId="ADAL" clId="{8FC618C2-55AC-4C6F-AD04-AE0682A0F0D3}" dt="2026-03-19T20:42:45.053" v="157"/>
+          <ac:picMkLst>
+            <pc:docMk/>
+            <pc:sldMk cId="4167088281" sldId="258"/>
+            <ac:picMk id="33" creationId="{B9D87FF3-8E39-5CB5-8825-C669A22F5C82}"/>
+          </ac:picMkLst>
+        </pc:picChg>
+        <pc:cxnChg chg="add mod">
+          <ac:chgData name="Jonas Bjurel" userId="05f6ddf6-7be8-452a-8077-00a16bc7f7a5" providerId="ADAL" clId="{8FC618C2-55AC-4C6F-AD04-AE0682A0F0D3}" dt="2026-03-19T19:55:14.669" v="138" actId="692"/>
+          <ac:cxnSpMkLst>
+            <pc:docMk/>
+            <pc:sldMk cId="4167088281" sldId="258"/>
+            <ac:cxnSpMk id="12" creationId="{8CE40194-8C70-76E2-88C2-C558CD9AB860}"/>
+          </ac:cxnSpMkLst>
+        </pc:cxnChg>
+        <pc:cxnChg chg="add mod">
+          <ac:chgData name="Jonas Bjurel" userId="05f6ddf6-7be8-452a-8077-00a16bc7f7a5" providerId="ADAL" clId="{8FC618C2-55AC-4C6F-AD04-AE0682A0F0D3}" dt="2026-03-19T19:55:14.669" v="138" actId="692"/>
+          <ac:cxnSpMkLst>
+            <pc:docMk/>
+            <pc:sldMk cId="4167088281" sldId="258"/>
+            <ac:cxnSpMk id="16" creationId="{EAA8F873-71BE-5090-53A1-1448CB5CC273}"/>
+          </ac:cxnSpMkLst>
+        </pc:cxnChg>
+        <pc:cxnChg chg="add mod">
+          <ac:chgData name="Jonas Bjurel" userId="05f6ddf6-7be8-452a-8077-00a16bc7f7a5" providerId="ADAL" clId="{8FC618C2-55AC-4C6F-AD04-AE0682A0F0D3}" dt="2026-03-19T19:55:14.669" v="138" actId="692"/>
+          <ac:cxnSpMkLst>
+            <pc:docMk/>
+            <pc:sldMk cId="4167088281" sldId="258"/>
+            <ac:cxnSpMk id="19" creationId="{F2F80D00-4C38-B974-549F-7D96445293EA}"/>
+          </ac:cxnSpMkLst>
+        </pc:cxnChg>
+        <pc:cxnChg chg="mod">
+          <ac:chgData name="Jonas Bjurel" userId="05f6ddf6-7be8-452a-8077-00a16bc7f7a5" providerId="ADAL" clId="{8FC618C2-55AC-4C6F-AD04-AE0682A0F0D3}" dt="2026-03-19T19:52:41.603" v="122" actId="14100"/>
+          <ac:cxnSpMkLst>
+            <pc:docMk/>
+            <pc:sldMk cId="4167088281" sldId="258"/>
+            <ac:cxnSpMk id="1058" creationId="{56E2B2D8-417C-DA01-42A9-DE6DF22AD033}"/>
+          </ac:cxnSpMkLst>
+        </pc:cxnChg>
+        <pc:cxnChg chg="mod">
+          <ac:chgData name="Jonas Bjurel" userId="05f6ddf6-7be8-452a-8077-00a16bc7f7a5" providerId="ADAL" clId="{8FC618C2-55AC-4C6F-AD04-AE0682A0F0D3}" dt="2026-03-19T19:53:05.794" v="125" actId="14100"/>
+          <ac:cxnSpMkLst>
+            <pc:docMk/>
+            <pc:sldMk cId="4167088281" sldId="258"/>
+            <ac:cxnSpMk id="1059" creationId="{EAD96700-DED0-EFCC-A1D9-C7BE6486429B}"/>
+          </ac:cxnSpMkLst>
+        </pc:cxnChg>
+        <pc:cxnChg chg="mod">
+          <ac:chgData name="Jonas Bjurel" userId="05f6ddf6-7be8-452a-8077-00a16bc7f7a5" providerId="ADAL" clId="{8FC618C2-55AC-4C6F-AD04-AE0682A0F0D3}" dt="2026-03-19T19:55:14.669" v="138" actId="692"/>
+          <ac:cxnSpMkLst>
+            <pc:docMk/>
+            <pc:sldMk cId="4167088281" sldId="258"/>
+            <ac:cxnSpMk id="1063" creationId="{6D762DCD-88F1-7FF8-B3FE-D2AF52A32F00}"/>
+          </ac:cxnSpMkLst>
+        </pc:cxnChg>
+        <pc:cxnChg chg="mod">
+          <ac:chgData name="Jonas Bjurel" userId="05f6ddf6-7be8-452a-8077-00a16bc7f7a5" providerId="ADAL" clId="{8FC618C2-55AC-4C6F-AD04-AE0682A0F0D3}" dt="2026-03-19T20:43:51.870" v="167" actId="14100"/>
+          <ac:cxnSpMkLst>
+            <pc:docMk/>
+            <pc:sldMk cId="4167088281" sldId="258"/>
+            <ac:cxnSpMk id="1071" creationId="{03954FCB-C67E-FA43-20F2-258F55923F0E}"/>
+          </ac:cxnSpMkLst>
+        </pc:cxnChg>
+        <pc:cxnChg chg="mod">
+          <ac:chgData name="Jonas Bjurel" userId="05f6ddf6-7be8-452a-8077-00a16bc7f7a5" providerId="ADAL" clId="{8FC618C2-55AC-4C6F-AD04-AE0682A0F0D3}" dt="2026-03-19T19:53:25.608" v="127" actId="14100"/>
+          <ac:cxnSpMkLst>
+            <pc:docMk/>
+            <pc:sldMk cId="4167088281" sldId="258"/>
+            <ac:cxnSpMk id="1072" creationId="{AB6F3CF5-0FAA-4633-A9DA-E33DD5C0703D}"/>
+          </ac:cxnSpMkLst>
+        </pc:cxnChg>
+      </pc:sldChg>
+      <pc:sldChg chg="addSp delSp modSp mod">
+        <pc:chgData name="Jonas Bjurel" userId="05f6ddf6-7be8-452a-8077-00a16bc7f7a5" providerId="ADAL" clId="{8FC618C2-55AC-4C6F-AD04-AE0682A0F0D3}" dt="2026-03-20T11:16:15.968" v="207" actId="404"/>
+        <pc:sldMkLst>
+          <pc:docMk/>
+          <pc:sldMk cId="242043410" sldId="259"/>
+        </pc:sldMkLst>
+        <pc:spChg chg="mod">
+          <ac:chgData name="Jonas Bjurel" userId="05f6ddf6-7be8-452a-8077-00a16bc7f7a5" providerId="ADAL" clId="{8FC618C2-55AC-4C6F-AD04-AE0682A0F0D3}" dt="2026-03-20T11:16:15.968" v="207" actId="404"/>
+          <ac:spMkLst>
+            <pc:docMk/>
+            <pc:sldMk cId="242043410" sldId="259"/>
+            <ac:spMk id="6" creationId="{0E9AB292-56E9-4E77-F8DE-09D42069106A}"/>
+          </ac:spMkLst>
+        </pc:spChg>
+        <pc:spChg chg="mod">
+          <ac:chgData name="Jonas Bjurel" userId="05f6ddf6-7be8-452a-8077-00a16bc7f7a5" providerId="ADAL" clId="{8FC618C2-55AC-4C6F-AD04-AE0682A0F0D3}" dt="2026-03-19T20:45:08.392" v="169"/>
+          <ac:spMkLst>
+            <pc:docMk/>
+            <pc:sldMk cId="242043410" sldId="259"/>
+            <ac:spMk id="38" creationId="{0294AC9C-4742-B280-96C1-AD5E1276A319}"/>
+          </ac:spMkLst>
+        </pc:spChg>
+        <pc:spChg chg="mod">
+          <ac:chgData name="Jonas Bjurel" userId="05f6ddf6-7be8-452a-8077-00a16bc7f7a5" providerId="ADAL" clId="{8FC618C2-55AC-4C6F-AD04-AE0682A0F0D3}" dt="2026-03-19T20:45:08.392" v="169"/>
+          <ac:spMkLst>
+            <pc:docMk/>
+            <pc:sldMk cId="242043410" sldId="259"/>
+            <ac:spMk id="46" creationId="{2BEB76C9-7675-2817-0D5A-7DE943703697}"/>
+          </ac:spMkLst>
+        </pc:spChg>
+        <pc:spChg chg="add mod">
+          <ac:chgData name="Jonas Bjurel" userId="05f6ddf6-7be8-452a-8077-00a16bc7f7a5" providerId="ADAL" clId="{8FC618C2-55AC-4C6F-AD04-AE0682A0F0D3}" dt="2026-03-19T21:07:12.354" v="178"/>
+          <ac:spMkLst>
+            <pc:docMk/>
+            <pc:sldMk cId="242043410" sldId="259"/>
+            <ac:spMk id="60" creationId="{1E1F29E9-CEFC-29C8-A850-648A9AE769A4}"/>
+          </ac:spMkLst>
+        </pc:spChg>
+        <pc:spChg chg="add mod">
+          <ac:chgData name="Jonas Bjurel" userId="05f6ddf6-7be8-452a-8077-00a16bc7f7a5" providerId="ADAL" clId="{8FC618C2-55AC-4C6F-AD04-AE0682A0F0D3}" dt="2026-03-19T21:07:12.354" v="178"/>
+          <ac:spMkLst>
+            <pc:docMk/>
+            <pc:sldMk cId="242043410" sldId="259"/>
+            <ac:spMk id="61" creationId="{2F4BFFA2-8471-6B08-7F21-828DE229A08C}"/>
+          </ac:spMkLst>
+        </pc:spChg>
+        <pc:spChg chg="add mod">
+          <ac:chgData name="Jonas Bjurel" userId="05f6ddf6-7be8-452a-8077-00a16bc7f7a5" providerId="ADAL" clId="{8FC618C2-55AC-4C6F-AD04-AE0682A0F0D3}" dt="2026-03-19T21:07:12.354" v="178"/>
+          <ac:spMkLst>
+            <pc:docMk/>
+            <pc:sldMk cId="242043410" sldId="259"/>
+            <ac:spMk id="1024" creationId="{8343F0F4-FA83-5452-B544-4D2368288202}"/>
+          </ac:spMkLst>
+        </pc:spChg>
+        <pc:spChg chg="add mod">
+          <ac:chgData name="Jonas Bjurel" userId="05f6ddf6-7be8-452a-8077-00a16bc7f7a5" providerId="ADAL" clId="{8FC618C2-55AC-4C6F-AD04-AE0682A0F0D3}" dt="2026-03-19T21:07:12.354" v="178"/>
+          <ac:spMkLst>
+            <pc:docMk/>
+            <pc:sldMk cId="242043410" sldId="259"/>
+            <ac:spMk id="1027" creationId="{D368CD8E-CBD4-AE2D-10B0-A448B41628E8}"/>
+          </ac:spMkLst>
+        </pc:spChg>
+        <pc:grpChg chg="add mod">
+          <ac:chgData name="Jonas Bjurel" userId="05f6ddf6-7be8-452a-8077-00a16bc7f7a5" providerId="ADAL" clId="{8FC618C2-55AC-4C6F-AD04-AE0682A0F0D3}" dt="2026-03-19T20:45:08.392" v="169"/>
+          <ac:grpSpMkLst>
+            <pc:docMk/>
+            <pc:sldMk cId="242043410" sldId="259"/>
+            <ac:grpSpMk id="33" creationId="{07DC100D-9B6D-2210-242D-DE5605950618}"/>
+          </ac:grpSpMkLst>
+        </pc:grpChg>
+        <pc:grpChg chg="add mod">
+          <ac:chgData name="Jonas Bjurel" userId="05f6ddf6-7be8-452a-8077-00a16bc7f7a5" providerId="ADAL" clId="{8FC618C2-55AC-4C6F-AD04-AE0682A0F0D3}" dt="2026-03-19T20:45:08.392" v="169"/>
+          <ac:grpSpMkLst>
+            <pc:docMk/>
+            <pc:sldMk cId="242043410" sldId="259"/>
+            <ac:grpSpMk id="40" creationId="{3CF37AF3-025A-B04B-9B37-0E1194404FD0}"/>
+          </ac:grpSpMkLst>
+        </pc:grpChg>
+        <pc:picChg chg="add mod">
+          <ac:chgData name="Jonas Bjurel" userId="05f6ddf6-7be8-452a-8077-00a16bc7f7a5" providerId="ADAL" clId="{8FC618C2-55AC-4C6F-AD04-AE0682A0F0D3}" dt="2026-03-19T20:45:08.392" v="169"/>
+          <ac:picMkLst>
+            <pc:docMk/>
+            <pc:sldMk cId="242043410" sldId="259"/>
+            <ac:picMk id="31" creationId="{2A9FF903-6884-570A-2EB1-2F485B61760D}"/>
+          </ac:picMkLst>
+        </pc:picChg>
+        <pc:picChg chg="mod">
+          <ac:chgData name="Jonas Bjurel" userId="05f6ddf6-7be8-452a-8077-00a16bc7f7a5" providerId="ADAL" clId="{8FC618C2-55AC-4C6F-AD04-AE0682A0F0D3}" dt="2026-03-19T20:45:08.392" v="169"/>
+          <ac:picMkLst>
+            <pc:docMk/>
+            <pc:sldMk cId="242043410" sldId="259"/>
+            <ac:picMk id="37" creationId="{6103750E-F7EC-B13C-5EE5-F73B45538F17}"/>
+          </ac:picMkLst>
+        </pc:picChg>
+        <pc:picChg chg="mod">
+          <ac:chgData name="Jonas Bjurel" userId="05f6ddf6-7be8-452a-8077-00a16bc7f7a5" providerId="ADAL" clId="{8FC618C2-55AC-4C6F-AD04-AE0682A0F0D3}" dt="2026-03-19T20:45:08.392" v="169"/>
+          <ac:picMkLst>
+            <pc:docMk/>
+            <pc:sldMk cId="242043410" sldId="259"/>
+            <ac:picMk id="41" creationId="{A1315B5B-56F0-8792-3D5A-C69B57D7B201}"/>
+          </ac:picMkLst>
+        </pc:picChg>
+        <pc:picChg chg="add mod">
+          <ac:chgData name="Jonas Bjurel" userId="05f6ddf6-7be8-452a-8077-00a16bc7f7a5" providerId="ADAL" clId="{8FC618C2-55AC-4C6F-AD04-AE0682A0F0D3}" dt="2026-03-19T20:45:08.392" v="169"/>
+          <ac:picMkLst>
+            <pc:docMk/>
+            <pc:sldMk cId="242043410" sldId="259"/>
+            <ac:picMk id="48" creationId="{6F32A148-9989-D614-1C25-5C98C3609B30}"/>
+          </ac:picMkLst>
+        </pc:picChg>
+        <pc:picChg chg="mod">
+          <ac:chgData name="Jonas Bjurel" userId="05f6ddf6-7be8-452a-8077-00a16bc7f7a5" providerId="ADAL" clId="{8FC618C2-55AC-4C6F-AD04-AE0682A0F0D3}" dt="2026-03-19T20:07:10.512" v="155" actId="1076"/>
+          <ac:picMkLst>
+            <pc:docMk/>
+            <pc:sldMk cId="242043410" sldId="259"/>
+            <ac:picMk id="1056" creationId="{B47AD5C1-9BD2-82D5-924F-7207F3E85BA0}"/>
+          </ac:picMkLst>
+        </pc:picChg>
+        <pc:picChg chg="del">
+          <ac:chgData name="Jonas Bjurel" userId="05f6ddf6-7be8-452a-8077-00a16bc7f7a5" providerId="ADAL" clId="{8FC618C2-55AC-4C6F-AD04-AE0682A0F0D3}" dt="2026-03-19T20:44:37.441" v="168" actId="21"/>
+          <ac:picMkLst>
+            <pc:docMk/>
+            <pc:sldMk cId="242043410" sldId="259"/>
+            <ac:picMk id="1064" creationId="{ECE9B160-1842-4120-6A09-999194F024D6}"/>
+          </ac:picMkLst>
+        </pc:picChg>
+        <pc:cxnChg chg="mod">
+          <ac:chgData name="Jonas Bjurel" userId="05f6ddf6-7be8-452a-8077-00a16bc7f7a5" providerId="ADAL" clId="{8FC618C2-55AC-4C6F-AD04-AE0682A0F0D3}" dt="2026-03-19T20:00:11.716" v="145" actId="14100"/>
+          <ac:cxnSpMkLst>
+            <pc:docMk/>
+            <pc:sldMk cId="242043410" sldId="259"/>
+            <ac:cxnSpMk id="9" creationId="{60D3D1B0-97C9-630F-E8B7-9592D7A972FE}"/>
+          </ac:cxnSpMkLst>
+        </pc:cxnChg>
+        <pc:cxnChg chg="mod">
+          <ac:chgData name="Jonas Bjurel" userId="05f6ddf6-7be8-452a-8077-00a16bc7f7a5" providerId="ADAL" clId="{8FC618C2-55AC-4C6F-AD04-AE0682A0F0D3}" dt="2026-03-19T20:00:04.070" v="144" actId="14100"/>
+          <ac:cxnSpMkLst>
+            <pc:docMk/>
+            <pc:sldMk cId="242043410" sldId="259"/>
+            <ac:cxnSpMk id="11" creationId="{BDD149AE-680E-33C3-1248-1B66C13F9102}"/>
+          </ac:cxnSpMkLst>
+        </pc:cxnChg>
+        <pc:cxnChg chg="mod">
+          <ac:chgData name="Jonas Bjurel" userId="05f6ddf6-7be8-452a-8077-00a16bc7f7a5" providerId="ADAL" clId="{8FC618C2-55AC-4C6F-AD04-AE0682A0F0D3}" dt="2026-03-19T20:03:23.260" v="148" actId="14100"/>
+          <ac:cxnSpMkLst>
+            <pc:docMk/>
+            <pc:sldMk cId="242043410" sldId="259"/>
+            <ac:cxnSpMk id="17" creationId="{3457A670-732B-863A-BA53-07F187207397}"/>
+          </ac:cxnSpMkLst>
+        </pc:cxnChg>
+        <pc:cxnChg chg="mod">
+          <ac:chgData name="Jonas Bjurel" userId="05f6ddf6-7be8-452a-8077-00a16bc7f7a5" providerId="ADAL" clId="{8FC618C2-55AC-4C6F-AD04-AE0682A0F0D3}" dt="2026-03-19T20:48:11.760" v="175" actId="14100"/>
+          <ac:cxnSpMkLst>
+            <pc:docMk/>
+            <pc:sldMk cId="242043410" sldId="259"/>
+            <ac:cxnSpMk id="24" creationId="{B0B1F267-6694-189C-3F2F-6FD8B04AAD58}"/>
+          </ac:cxnSpMkLst>
+        </pc:cxnChg>
+        <pc:cxnChg chg="add del mod">
+          <ac:chgData name="Jonas Bjurel" userId="05f6ddf6-7be8-452a-8077-00a16bc7f7a5" providerId="ADAL" clId="{8FC618C2-55AC-4C6F-AD04-AE0682A0F0D3}" dt="2026-03-19T20:45:30.102" v="172" actId="21"/>
+          <ac:cxnSpMkLst>
+            <pc:docMk/>
+            <pc:sldMk cId="242043410" sldId="259"/>
+            <ac:cxnSpMk id="32" creationId="{892FD0B2-463B-31F9-5A73-AC58B0A5F4D0}"/>
+          </ac:cxnSpMkLst>
+        </pc:cxnChg>
+        <pc:cxnChg chg="add mod">
+          <ac:chgData name="Jonas Bjurel" userId="05f6ddf6-7be8-452a-8077-00a16bc7f7a5" providerId="ADAL" clId="{8FC618C2-55AC-4C6F-AD04-AE0682A0F0D3}" dt="2026-03-19T21:18:01.872" v="182" actId="14100"/>
+          <ac:cxnSpMkLst>
+            <pc:docMk/>
+            <pc:sldMk cId="242043410" sldId="259"/>
+            <ac:cxnSpMk id="1029" creationId="{120DC216-9949-DE24-6D9E-D508B5741AF1}"/>
+          </ac:cxnSpMkLst>
+        </pc:cxnChg>
+        <pc:cxnChg chg="add mod">
+          <ac:chgData name="Jonas Bjurel" userId="05f6ddf6-7be8-452a-8077-00a16bc7f7a5" providerId="ADAL" clId="{8FC618C2-55AC-4C6F-AD04-AE0682A0F0D3}" dt="2026-03-19T21:18:16.198" v="185" actId="14100"/>
+          <ac:cxnSpMkLst>
+            <pc:docMk/>
+            <pc:sldMk cId="242043410" sldId="259"/>
+            <ac:cxnSpMk id="1033" creationId="{DAD59B41-BAAE-24CF-793B-B3F5A73C3951}"/>
+          </ac:cxnSpMkLst>
+        </pc:cxnChg>
+        <pc:cxnChg chg="add mod">
+          <ac:chgData name="Jonas Bjurel" userId="05f6ddf6-7be8-452a-8077-00a16bc7f7a5" providerId="ADAL" clId="{8FC618C2-55AC-4C6F-AD04-AE0682A0F0D3}" dt="2026-03-19T21:18:31.378" v="188" actId="14100"/>
+          <ac:cxnSpMkLst>
+            <pc:docMk/>
+            <pc:sldMk cId="242043410" sldId="259"/>
+            <ac:cxnSpMk id="1037" creationId="{ED1A721E-7BDA-C997-6D45-F8F9AC848F93}"/>
+          </ac:cxnSpMkLst>
+        </pc:cxnChg>
+        <pc:cxnChg chg="mod">
+          <ac:chgData name="Jonas Bjurel" userId="05f6ddf6-7be8-452a-8077-00a16bc7f7a5" providerId="ADAL" clId="{8FC618C2-55AC-4C6F-AD04-AE0682A0F0D3}" dt="2026-03-19T20:07:18.282" v="156" actId="14100"/>
+          <ac:cxnSpMkLst>
+            <pc:docMk/>
+            <pc:sldMk cId="242043410" sldId="259"/>
+            <ac:cxnSpMk id="1058" creationId="{964998DE-6BEF-F95A-4AEF-40E9AAA3EFFA}"/>
+          </ac:cxnSpMkLst>
+        </pc:cxnChg>
+        <pc:cxnChg chg="mod">
+          <ac:chgData name="Jonas Bjurel" userId="05f6ddf6-7be8-452a-8077-00a16bc7f7a5" providerId="ADAL" clId="{8FC618C2-55AC-4C6F-AD04-AE0682A0F0D3}" dt="2026-03-19T19:59:35.997" v="142" actId="14100"/>
+          <ac:cxnSpMkLst>
+            <pc:docMk/>
+            <pc:sldMk cId="242043410" sldId="259"/>
+            <ac:cxnSpMk id="1059" creationId="{9DDB2645-B94E-B607-3C82-5A551EFFDA80}"/>
+          </ac:cxnSpMkLst>
+        </pc:cxnChg>
+        <pc:cxnChg chg="mod">
+          <ac:chgData name="Jonas Bjurel" userId="05f6ddf6-7be8-452a-8077-00a16bc7f7a5" providerId="ADAL" clId="{8FC618C2-55AC-4C6F-AD04-AE0682A0F0D3}" dt="2026-03-19T19:59:29.007" v="141" actId="14100"/>
+          <ac:cxnSpMkLst>
+            <pc:docMk/>
+            <pc:sldMk cId="242043410" sldId="259"/>
+            <ac:cxnSpMk id="1063" creationId="{92837522-F19F-3491-FBFA-6373E55C05DE}"/>
+          </ac:cxnSpMkLst>
+        </pc:cxnChg>
+        <pc:cxnChg chg="mod">
+          <ac:chgData name="Jonas Bjurel" userId="05f6ddf6-7be8-452a-8077-00a16bc7f7a5" providerId="ADAL" clId="{8FC618C2-55AC-4C6F-AD04-AE0682A0F0D3}" dt="2026-03-19T20:45:36.064" v="173" actId="14100"/>
+          <ac:cxnSpMkLst>
+            <pc:docMk/>
+            <pc:sldMk cId="242043410" sldId="259"/>
+            <ac:cxnSpMk id="1071" creationId="{68A25A87-86D9-6688-166D-8CDCDB089E60}"/>
+          </ac:cxnSpMkLst>
+        </pc:cxnChg>
+        <pc:cxnChg chg="mod">
+          <ac:chgData name="Jonas Bjurel" userId="05f6ddf6-7be8-452a-8077-00a16bc7f7a5" providerId="ADAL" clId="{8FC618C2-55AC-4C6F-AD04-AE0682A0F0D3}" dt="2026-03-19T19:59:18.728" v="140" actId="14100"/>
+          <ac:cxnSpMkLst>
+            <pc:docMk/>
+            <pc:sldMk cId="242043410" sldId="259"/>
+            <ac:cxnSpMk id="1072" creationId="{15492937-14ED-8961-D0BF-A31377B97429}"/>
+          </ac:cxnSpMkLst>
+        </pc:cxnChg>
+      </pc:sldChg>
+      <pc:sldChg chg="add del">
+        <pc:chgData name="Jonas Bjurel" userId="05f6ddf6-7be8-452a-8077-00a16bc7f7a5" providerId="ADAL" clId="{8FC618C2-55AC-4C6F-AD04-AE0682A0F0D3}" dt="2026-03-20T11:18:20.872" v="209" actId="2696"/>
+        <pc:sldMkLst>
+          <pc:docMk/>
+          <pc:sldMk cId="964817573" sldId="260"/>
+        </pc:sldMkLst>
+      </pc:sldChg>
+    </pc:docChg>
+  </pc:docChgLst>
+</pc:chgInfo>
 </file>
 
 <file path=ppt/slideLayouts/slideLayout1.xml><?xml version="1.0" encoding="utf-8"?>
@@ -259,7 +762,7 @@
           <a:p>
             <a:fld id="{FA8E5948-F635-49F2-A61E-B222DCBD2746}" type="datetimeFigureOut">
               <a:rPr lang="en-SE" smtClean="0"/>
-              <a:t>2026-03-18</a:t>
+              <a:t>2026-03-19</a:t>
             </a:fld>
             <a:endParaRPr lang="en-SE"/>
           </a:p>
@@ -459,7 +962,7 @@
           <a:p>
             <a:fld id="{FA8E5948-F635-49F2-A61E-B222DCBD2746}" type="datetimeFigureOut">
               <a:rPr lang="en-SE" smtClean="0"/>
-              <a:t>2026-03-18</a:t>
+              <a:t>2026-03-19</a:t>
             </a:fld>
             <a:endParaRPr lang="en-SE"/>
           </a:p>
@@ -669,7 +1172,7 @@
           <a:p>
             <a:fld id="{FA8E5948-F635-49F2-A61E-B222DCBD2746}" type="datetimeFigureOut">
               <a:rPr lang="en-SE" smtClean="0"/>
-              <a:t>2026-03-18</a:t>
+              <a:t>2026-03-19</a:t>
             </a:fld>
             <a:endParaRPr lang="en-SE"/>
           </a:p>
@@ -869,7 +1372,7 @@
           <a:p>
             <a:fld id="{FA8E5948-F635-49F2-A61E-B222DCBD2746}" type="datetimeFigureOut">
               <a:rPr lang="en-SE" smtClean="0"/>
-              <a:t>2026-03-18</a:t>
+              <a:t>2026-03-19</a:t>
             </a:fld>
             <a:endParaRPr lang="en-SE"/>
           </a:p>
@@ -1145,7 +1648,7 @@
           <a:p>
             <a:fld id="{FA8E5948-F635-49F2-A61E-B222DCBD2746}" type="datetimeFigureOut">
               <a:rPr lang="en-SE" smtClean="0"/>
-              <a:t>2026-03-18</a:t>
+              <a:t>2026-03-19</a:t>
             </a:fld>
             <a:endParaRPr lang="en-SE"/>
           </a:p>
@@ -1413,7 +1916,7 @@
           <a:p>
             <a:fld id="{FA8E5948-F635-49F2-A61E-B222DCBD2746}" type="datetimeFigureOut">
               <a:rPr lang="en-SE" smtClean="0"/>
-              <a:t>2026-03-18</a:t>
+              <a:t>2026-03-19</a:t>
             </a:fld>
             <a:endParaRPr lang="en-SE"/>
           </a:p>
@@ -1828,7 +2331,7 @@
           <a:p>
             <a:fld id="{FA8E5948-F635-49F2-A61E-B222DCBD2746}" type="datetimeFigureOut">
               <a:rPr lang="en-SE" smtClean="0"/>
-              <a:t>2026-03-18</a:t>
+              <a:t>2026-03-19</a:t>
             </a:fld>
             <a:endParaRPr lang="en-SE"/>
           </a:p>
@@ -1970,7 +2473,7 @@
           <a:p>
             <a:fld id="{FA8E5948-F635-49F2-A61E-B222DCBD2746}" type="datetimeFigureOut">
               <a:rPr lang="en-SE" smtClean="0"/>
-              <a:t>2026-03-18</a:t>
+              <a:t>2026-03-19</a:t>
             </a:fld>
             <a:endParaRPr lang="en-SE"/>
           </a:p>
@@ -2083,7 +2586,7 @@
           <a:p>
             <a:fld id="{FA8E5948-F635-49F2-A61E-B222DCBD2746}" type="datetimeFigureOut">
               <a:rPr lang="en-SE" smtClean="0"/>
-              <a:t>2026-03-18</a:t>
+              <a:t>2026-03-19</a:t>
             </a:fld>
             <a:endParaRPr lang="en-SE"/>
           </a:p>
@@ -2396,7 +2899,7 @@
           <a:p>
             <a:fld id="{FA8E5948-F635-49F2-A61E-B222DCBD2746}" type="datetimeFigureOut">
               <a:rPr lang="en-SE" smtClean="0"/>
-              <a:t>2026-03-18</a:t>
+              <a:t>2026-03-19</a:t>
             </a:fld>
             <a:endParaRPr lang="en-SE"/>
           </a:p>
@@ -2685,7 +3188,7 @@
           <a:p>
             <a:fld id="{FA8E5948-F635-49F2-A61E-B222DCBD2746}" type="datetimeFigureOut">
               <a:rPr lang="en-SE" smtClean="0"/>
-              <a:t>2026-03-18</a:t>
+              <a:t>2026-03-19</a:t>
             </a:fld>
             <a:endParaRPr lang="en-SE"/>
           </a:p>
@@ -2928,7 +3431,7 @@
           <a:p>
             <a:fld id="{FA8E5948-F635-49F2-A61E-B222DCBD2746}" type="datetimeFigureOut">
               <a:rPr lang="en-SE" smtClean="0"/>
-              <a:t>2026-03-18</a:t>
+              <a:t>2026-03-19</a:t>
             </a:fld>
             <a:endParaRPr lang="en-SE"/>
           </a:p>
@@ -5315,8 +5818,8 @@
         </p:blipFill>
         <p:spPr bwMode="auto">
           <a:xfrm>
-            <a:off x="9143889" y="530332"/>
-            <a:ext cx="1413837" cy="881353"/>
+            <a:off x="8028087" y="607986"/>
+            <a:ext cx="1133895" cy="706844"/>
           </a:xfrm>
           <a:prstGeom prst="rect">
             <a:avLst/>
@@ -5409,7 +5912,7 @@
         </p:blipFill>
         <p:spPr bwMode="auto">
           <a:xfrm>
-            <a:off x="8921167" y="2994660"/>
+            <a:off x="8921167" y="3148663"/>
             <a:ext cx="1859279" cy="1859279"/>
           </a:xfrm>
           <a:prstGeom prst="rect">
@@ -5528,8 +6031,8 @@
         </p:nvCxnSpPr>
         <p:spPr>
           <a:xfrm>
-            <a:off x="8028087" y="961807"/>
-            <a:ext cx="1310646" cy="0"/>
+            <a:off x="8024912" y="957483"/>
+            <a:ext cx="256540" cy="0"/>
           </a:xfrm>
           <a:prstGeom prst="line">
             <a:avLst/>
@@ -5932,6 +6435,295 @@
           </a:p>
         </p:txBody>
       </p:sp>
+      <p:grpSp>
+        <p:nvGrpSpPr>
+          <p:cNvPr id="11" name="Group 10">
+            <a:extLst>
+              <a:ext uri="{FF2B5EF4-FFF2-40B4-BE49-F238E27FC236}">
+                <a16:creationId xmlns:a16="http://schemas.microsoft.com/office/drawing/2014/main" id="{98248B6C-B144-A84B-EF7C-4997F1DEA078}"/>
+              </a:ext>
+            </a:extLst>
+          </p:cNvPr>
+          <p:cNvGrpSpPr/>
+          <p:nvPr/>
+        </p:nvGrpSpPr>
+        <p:grpSpPr>
+          <a:xfrm>
+            <a:off x="9381355" y="579610"/>
+            <a:ext cx="872438" cy="881738"/>
+            <a:chOff x="8770838" y="560430"/>
+            <a:chExt cx="872438" cy="881738"/>
+          </a:xfrm>
+        </p:grpSpPr>
+        <p:pic>
+          <p:nvPicPr>
+            <p:cNvPr id="5" name="Picture 4" descr="Hand-drawn Vector Illustration of a Two-door Refrigerator ...">
+              <a:extLst>
+                <a:ext uri="{FF2B5EF4-FFF2-40B4-BE49-F238E27FC236}">
+                  <a16:creationId xmlns:a16="http://schemas.microsoft.com/office/drawing/2014/main" id="{362AD73B-A2C0-40FF-43EA-64FF4F5D28FD}"/>
+                </a:ext>
+              </a:extLst>
+            </p:cNvPr>
+            <p:cNvPicPr>
+              <a:picLocks noChangeAspect="1" noChangeArrowheads="1"/>
+            </p:cNvPicPr>
+            <p:nvPr/>
+          </p:nvPicPr>
+          <p:blipFill>
+            <a:blip r:embed="rId8">
+              <a:extLst>
+                <a:ext uri="{28A0092B-C50C-407E-A947-70E740481C1C}">
+                  <a14:useLocalDpi xmlns:a14="http://schemas.microsoft.com/office/drawing/2010/main" val="0"/>
+                </a:ext>
+              </a:extLst>
+            </a:blip>
+            <a:srcRect/>
+            <a:stretch>
+              <a:fillRect/>
+            </a:stretch>
+          </p:blipFill>
+          <p:spPr bwMode="auto">
+            <a:xfrm>
+              <a:off x="8830990" y="560430"/>
+              <a:ext cx="812286" cy="857965"/>
+            </a:xfrm>
+            <a:prstGeom prst="rect">
+              <a:avLst/>
+            </a:prstGeom>
+            <a:noFill/>
+            <a:extLst>
+              <a:ext uri="{909E8E84-426E-40DD-AFC4-6F175D3DCCD1}">
+                <a14:hiddenFill xmlns:a14="http://schemas.microsoft.com/office/drawing/2010/main">
+                  <a:solidFill>
+                    <a:srgbClr val="FFFFFF"/>
+                  </a:solidFill>
+                </a14:hiddenFill>
+              </a:ext>
+            </a:extLst>
+          </p:spPr>
+        </p:pic>
+        <p:sp>
+          <p:nvSpPr>
+            <p:cNvPr id="7" name="Rectangle 6">
+              <a:extLst>
+                <a:ext uri="{FF2B5EF4-FFF2-40B4-BE49-F238E27FC236}">
+                  <a16:creationId xmlns:a16="http://schemas.microsoft.com/office/drawing/2014/main" id="{937F355D-5ACB-79FB-CF32-966E4C3E2CC4}"/>
+                </a:ext>
+              </a:extLst>
+            </p:cNvPr>
+            <p:cNvSpPr/>
+            <p:nvPr/>
+          </p:nvSpPr>
+          <p:spPr>
+            <a:xfrm>
+              <a:off x="8770838" y="1325587"/>
+              <a:ext cx="872438" cy="116581"/>
+            </a:xfrm>
+            <a:prstGeom prst="rect">
+              <a:avLst/>
+            </a:prstGeom>
+            <a:solidFill>
+              <a:schemeClr val="bg1"/>
+            </a:solidFill>
+            <a:ln>
+              <a:solidFill>
+                <a:schemeClr val="bg1"/>
+              </a:solidFill>
+            </a:ln>
+          </p:spPr>
+          <p:style>
+            <a:lnRef idx="2">
+              <a:schemeClr val="accent1">
+                <a:shade val="15000"/>
+              </a:schemeClr>
+            </a:lnRef>
+            <a:fillRef idx="1">
+              <a:schemeClr val="accent1"/>
+            </a:fillRef>
+            <a:effectRef idx="0">
+              <a:schemeClr val="accent1"/>
+            </a:effectRef>
+            <a:fontRef idx="minor">
+              <a:schemeClr val="lt1"/>
+            </a:fontRef>
+          </p:style>
+          <p:txBody>
+            <a:bodyPr rtlCol="0" anchor="ctr"/>
+            <a:lstStyle/>
+            <a:p>
+              <a:pPr algn="ctr"/>
+              <a:endParaRPr lang="en-SE"/>
+            </a:p>
+          </p:txBody>
+        </p:sp>
+      </p:grpSp>
+      <p:grpSp>
+        <p:nvGrpSpPr>
+          <p:cNvPr id="16" name="Group 15">
+            <a:extLst>
+              <a:ext uri="{FF2B5EF4-FFF2-40B4-BE49-F238E27FC236}">
+                <a16:creationId xmlns:a16="http://schemas.microsoft.com/office/drawing/2014/main" id="{19E72DC1-E7E2-A91B-2D18-45564056A3D2}"/>
+              </a:ext>
+            </a:extLst>
+          </p:cNvPr>
+          <p:cNvGrpSpPr/>
+          <p:nvPr/>
+        </p:nvGrpSpPr>
+        <p:grpSpPr>
+          <a:xfrm>
+            <a:off x="9950175" y="500417"/>
+            <a:ext cx="961089" cy="992387"/>
+            <a:chOff x="9493250" y="449781"/>
+            <a:chExt cx="961089" cy="992387"/>
+          </a:xfrm>
+        </p:grpSpPr>
+        <p:pic>
+          <p:nvPicPr>
+            <p:cNvPr id="13" name="Picture 6" descr="Hand drawn sketch of kitchen stove – Royalty-Free Vector ...">
+              <a:extLst>
+                <a:ext uri="{FF2B5EF4-FFF2-40B4-BE49-F238E27FC236}">
+                  <a16:creationId xmlns:a16="http://schemas.microsoft.com/office/drawing/2014/main" id="{8FD0DADB-6CC1-0420-F72A-E3D6C79CCFED}"/>
+                </a:ext>
+              </a:extLst>
+            </p:cNvPr>
+            <p:cNvPicPr>
+              <a:picLocks noChangeAspect="1" noChangeArrowheads="1"/>
+            </p:cNvPicPr>
+            <p:nvPr/>
+          </p:nvPicPr>
+          <p:blipFill>
+            <a:blip r:embed="rId9">
+              <a:extLst>
+                <a:ext uri="{28A0092B-C50C-407E-A947-70E740481C1C}">
+                  <a14:useLocalDpi xmlns:a14="http://schemas.microsoft.com/office/drawing/2010/main" val="0"/>
+                </a:ext>
+              </a:extLst>
+            </a:blip>
+            <a:srcRect/>
+            <a:stretch>
+              <a:fillRect/>
+            </a:stretch>
+          </p:blipFill>
+          <p:spPr bwMode="auto">
+            <a:xfrm>
+              <a:off x="9552017" y="449781"/>
+              <a:ext cx="902322" cy="974508"/>
+            </a:xfrm>
+            <a:prstGeom prst="rect">
+              <a:avLst/>
+            </a:prstGeom>
+            <a:noFill/>
+            <a:extLst>
+              <a:ext uri="{909E8E84-426E-40DD-AFC4-6F175D3DCCD1}">
+                <a14:hiddenFill xmlns:a14="http://schemas.microsoft.com/office/drawing/2010/main">
+                  <a:solidFill>
+                    <a:srgbClr val="FFFFFF"/>
+                  </a:solidFill>
+                </a14:hiddenFill>
+              </a:ext>
+            </a:extLst>
+          </p:spPr>
+        </p:pic>
+        <p:sp>
+          <p:nvSpPr>
+            <p:cNvPr id="14" name="Rectangle 13">
+              <a:extLst>
+                <a:ext uri="{FF2B5EF4-FFF2-40B4-BE49-F238E27FC236}">
+                  <a16:creationId xmlns:a16="http://schemas.microsoft.com/office/drawing/2014/main" id="{4FD66D4D-6766-3D74-4F5E-D415216DA7C5}"/>
+                </a:ext>
+              </a:extLst>
+            </p:cNvPr>
+            <p:cNvSpPr/>
+            <p:nvPr/>
+          </p:nvSpPr>
+          <p:spPr>
+            <a:xfrm>
+              <a:off x="9493250" y="1325587"/>
+              <a:ext cx="961089" cy="116581"/>
+            </a:xfrm>
+            <a:prstGeom prst="rect">
+              <a:avLst/>
+            </a:prstGeom>
+            <a:solidFill>
+              <a:schemeClr val="bg1"/>
+            </a:solidFill>
+            <a:ln>
+              <a:noFill/>
+            </a:ln>
+          </p:spPr>
+          <p:style>
+            <a:lnRef idx="2">
+              <a:schemeClr val="accent1">
+                <a:shade val="15000"/>
+              </a:schemeClr>
+            </a:lnRef>
+            <a:fillRef idx="1">
+              <a:schemeClr val="accent1"/>
+            </a:fillRef>
+            <a:effectRef idx="0">
+              <a:schemeClr val="accent1"/>
+            </a:effectRef>
+            <a:fontRef idx="minor">
+              <a:schemeClr val="lt1"/>
+            </a:fontRef>
+          </p:style>
+          <p:txBody>
+            <a:bodyPr rtlCol="0" anchor="ctr"/>
+            <a:lstStyle/>
+            <a:p>
+              <a:pPr algn="ctr"/>
+              <a:endParaRPr lang="en-SE"/>
+            </a:p>
+          </p:txBody>
+        </p:sp>
+      </p:grpSp>
+      <p:pic>
+        <p:nvPicPr>
+          <p:cNvPr id="31" name="Picture 8" descr="Sketch Empty electric socket. Cartoon, hand drawn unplugged european wall outlet. Cartoon, hand drawn unplugged european wall outlet , sketch style, isolated on white background.">
+            <a:extLst>
+              <a:ext uri="{FF2B5EF4-FFF2-40B4-BE49-F238E27FC236}">
+                <a16:creationId xmlns:a16="http://schemas.microsoft.com/office/drawing/2014/main" id="{B2FC8676-AE21-1D01-7AF8-6562DBB8C3ED}"/>
+              </a:ext>
+            </a:extLst>
+          </p:cNvPr>
+          <p:cNvPicPr>
+            <a:picLocks noChangeAspect="1" noChangeArrowheads="1"/>
+          </p:cNvPicPr>
+          <p:nvPr/>
+        </p:nvPicPr>
+        <p:blipFill>
+          <a:blip r:embed="rId10">
+            <a:extLst>
+              <a:ext uri="{28A0092B-C50C-407E-A947-70E740481C1C}">
+                <a14:useLocalDpi xmlns:a14="http://schemas.microsoft.com/office/drawing/2010/main" val="0"/>
+              </a:ext>
+            </a:extLst>
+          </a:blip>
+          <a:srcRect/>
+          <a:stretch>
+            <a:fillRect/>
+          </a:stretch>
+        </p:blipFill>
+        <p:spPr bwMode="auto">
+          <a:xfrm rot="5400000">
+            <a:off x="8814606" y="569269"/>
+            <a:ext cx="812286" cy="812286"/>
+          </a:xfrm>
+          <a:prstGeom prst="rect">
+            <a:avLst/>
+          </a:prstGeom>
+          <a:noFill/>
+          <a:extLst>
+            <a:ext uri="{909E8E84-426E-40DD-AFC4-6F175D3DCCD1}">
+              <a14:hiddenFill xmlns:a14="http://schemas.microsoft.com/office/drawing/2010/main">
+                <a:solidFill>
+                  <a:srgbClr val="FFFFFF"/>
+                </a:solidFill>
+              </a14:hiddenFill>
+            </a:ext>
+          </a:extLst>
+        </p:spPr>
+      </p:pic>
     </p:spTree>
     <p:extLst>
       <p:ext uri="{BB962C8B-B14F-4D97-AF65-F5344CB8AC3E}">
@@ -7231,9 +8023,9 @@
           <p:nvPr/>
         </p:nvCxnSpPr>
         <p:spPr>
-          <a:xfrm>
-            <a:off x="7006004" y="979588"/>
-            <a:ext cx="2366596" cy="0"/>
+          <a:xfrm flipV="1">
+            <a:off x="7001642" y="958498"/>
+            <a:ext cx="1273450" cy="5172"/>
           </a:xfrm>
           <a:prstGeom prst="line">
             <a:avLst/>
@@ -7830,13 +8622,14 @@
           </p:cNvPr>
           <p:cNvCxnSpPr>
             <a:cxnSpLocks/>
+            <a:stCxn id="3" idx="3"/>
           </p:cNvCxnSpPr>
           <p:nvPr/>
         </p:nvCxnSpPr>
         <p:spPr>
-          <a:xfrm flipH="1" flipV="1">
-            <a:off x="4839688" y="1181894"/>
-            <a:ext cx="369345" cy="3254829"/>
+          <a:xfrm flipV="1">
+            <a:off x="6075714" y="2521819"/>
+            <a:ext cx="1766649" cy="2766429"/>
           </a:xfrm>
           <a:prstGeom prst="line">
             <a:avLst/>
@@ -7873,14 +8666,14 @@
           </p:cNvPr>
           <p:cNvCxnSpPr>
             <a:cxnSpLocks/>
-            <a:stCxn id="1049" idx="2"/>
+            <a:endCxn id="3" idx="3"/>
           </p:cNvCxnSpPr>
           <p:nvPr/>
         </p:nvCxnSpPr>
         <p:spPr>
-          <a:xfrm flipH="1" flipV="1">
-            <a:off x="4879149" y="1181894"/>
-            <a:ext cx="3248979" cy="879495"/>
+          <a:xfrm flipH="1">
+            <a:off x="6075714" y="4242969"/>
+            <a:ext cx="1764143" cy="1045279"/>
           </a:xfrm>
           <a:prstGeom prst="line">
             <a:avLst/>
@@ -7917,14 +8710,14 @@
           </p:cNvPr>
           <p:cNvCxnSpPr>
             <a:cxnSpLocks/>
-            <a:stCxn id="1048" idx="2"/>
+            <a:stCxn id="1056" idx="0"/>
           </p:cNvCxnSpPr>
           <p:nvPr/>
         </p:nvCxnSpPr>
         <p:spPr>
           <a:xfrm flipH="1" flipV="1">
             <a:off x="4834009" y="1172343"/>
-            <a:ext cx="3294262" cy="2591947"/>
+            <a:ext cx="688000" cy="2782627"/>
           </a:xfrm>
           <a:prstGeom prst="line">
             <a:avLst/>
@@ -7933,6 +8726,7 @@
             <a:solidFill>
               <a:srgbClr val="FF0000"/>
             </a:solidFill>
+            <a:prstDash val="dashDot"/>
           </a:ln>
         </p:spPr>
         <p:style>
@@ -7961,14 +8755,14 @@
           </p:cNvPr>
           <p:cNvCxnSpPr>
             <a:cxnSpLocks/>
-            <a:stCxn id="1053" idx="2"/>
+            <a:endCxn id="3" idx="3"/>
           </p:cNvCxnSpPr>
           <p:nvPr/>
         </p:nvCxnSpPr>
         <p:spPr>
           <a:xfrm flipH="1" flipV="1">
-            <a:off x="4834009" y="1181894"/>
-            <a:ext cx="3314539" cy="4279298"/>
+            <a:off x="6075714" y="5288248"/>
+            <a:ext cx="1787069" cy="637991"/>
           </a:xfrm>
           <a:prstGeom prst="line">
             <a:avLst/>
@@ -8289,6 +9083,475 @@
           </a:p>
         </p:txBody>
       </p:sp>
+      <p:cxnSp>
+        <p:nvCxnSpPr>
+          <p:cNvPr id="12" name="Straight Connector 11">
+            <a:extLst>
+              <a:ext uri="{FF2B5EF4-FFF2-40B4-BE49-F238E27FC236}">
+                <a16:creationId xmlns:a16="http://schemas.microsoft.com/office/drawing/2014/main" id="{8CE40194-8C70-76E2-88C2-C558CD9AB860}"/>
+              </a:ext>
+            </a:extLst>
+          </p:cNvPr>
+          <p:cNvCxnSpPr>
+            <a:cxnSpLocks/>
+            <a:stCxn id="1049" idx="0"/>
+          </p:cNvCxnSpPr>
+          <p:nvPr/>
+        </p:nvCxnSpPr>
+        <p:spPr>
+          <a:xfrm flipH="1" flipV="1">
+            <a:off x="4829693" y="1181069"/>
+            <a:ext cx="3298435" cy="435797"/>
+          </a:xfrm>
+          <a:prstGeom prst="line">
+            <a:avLst/>
+          </a:prstGeom>
+          <a:ln w="9525">
+            <a:solidFill>
+              <a:srgbClr val="FF0000"/>
+            </a:solidFill>
+            <a:prstDash val="dashDot"/>
+          </a:ln>
+        </p:spPr>
+        <p:style>
+          <a:lnRef idx="2">
+            <a:schemeClr val="accent1"/>
+          </a:lnRef>
+          <a:fillRef idx="0">
+            <a:schemeClr val="accent1"/>
+          </a:fillRef>
+          <a:effectRef idx="1">
+            <a:schemeClr val="accent1"/>
+          </a:effectRef>
+          <a:fontRef idx="minor">
+            <a:schemeClr val="tx1"/>
+          </a:fontRef>
+        </p:style>
+      </p:cxnSp>
+      <p:cxnSp>
+        <p:nvCxnSpPr>
+          <p:cNvPr id="16" name="Straight Connector 15">
+            <a:extLst>
+              <a:ext uri="{FF2B5EF4-FFF2-40B4-BE49-F238E27FC236}">
+                <a16:creationId xmlns:a16="http://schemas.microsoft.com/office/drawing/2014/main" id="{EAA8F873-71BE-5090-53A1-1448CB5CC273}"/>
+              </a:ext>
+            </a:extLst>
+          </p:cNvPr>
+          <p:cNvCxnSpPr>
+            <a:cxnSpLocks/>
+          </p:cNvCxnSpPr>
+          <p:nvPr/>
+        </p:nvCxnSpPr>
+        <p:spPr>
+          <a:xfrm flipH="1" flipV="1">
+            <a:off x="4829693" y="1213904"/>
+            <a:ext cx="3302204" cy="2125939"/>
+          </a:xfrm>
+          <a:prstGeom prst="line">
+            <a:avLst/>
+          </a:prstGeom>
+          <a:ln w="9525">
+            <a:solidFill>
+              <a:srgbClr val="FF0000"/>
+            </a:solidFill>
+            <a:prstDash val="dashDot"/>
+          </a:ln>
+        </p:spPr>
+        <p:style>
+          <a:lnRef idx="2">
+            <a:schemeClr val="accent1"/>
+          </a:lnRef>
+          <a:fillRef idx="0">
+            <a:schemeClr val="accent1"/>
+          </a:fillRef>
+          <a:effectRef idx="1">
+            <a:schemeClr val="accent1"/>
+          </a:effectRef>
+          <a:fontRef idx="minor">
+            <a:schemeClr val="tx1"/>
+          </a:fontRef>
+        </p:style>
+      </p:cxnSp>
+      <p:cxnSp>
+        <p:nvCxnSpPr>
+          <p:cNvPr id="19" name="Straight Connector 18">
+            <a:extLst>
+              <a:ext uri="{FF2B5EF4-FFF2-40B4-BE49-F238E27FC236}">
+                <a16:creationId xmlns:a16="http://schemas.microsoft.com/office/drawing/2014/main" id="{F2F80D00-4C38-B974-549F-7D96445293EA}"/>
+              </a:ext>
+            </a:extLst>
+          </p:cNvPr>
+          <p:cNvCxnSpPr>
+            <a:cxnSpLocks/>
+          </p:cNvCxnSpPr>
+          <p:nvPr/>
+        </p:nvCxnSpPr>
+        <p:spPr>
+          <a:xfrm flipH="1" flipV="1">
+            <a:off x="4796125" y="1213903"/>
+            <a:ext cx="3328785" cy="3793028"/>
+          </a:xfrm>
+          <a:prstGeom prst="line">
+            <a:avLst/>
+          </a:prstGeom>
+          <a:ln w="9525">
+            <a:solidFill>
+              <a:srgbClr val="FF0000"/>
+            </a:solidFill>
+            <a:prstDash val="dashDot"/>
+          </a:ln>
+        </p:spPr>
+        <p:style>
+          <a:lnRef idx="2">
+            <a:schemeClr val="accent1"/>
+          </a:lnRef>
+          <a:fillRef idx="0">
+            <a:schemeClr val="accent1"/>
+          </a:fillRef>
+          <a:effectRef idx="1">
+            <a:schemeClr val="accent1"/>
+          </a:effectRef>
+          <a:fontRef idx="minor">
+            <a:schemeClr val="tx1"/>
+          </a:fontRef>
+        </p:style>
+      </p:cxnSp>
+      <p:pic>
+        <p:nvPicPr>
+          <p:cNvPr id="23" name="Picture 8" descr="Minimalist light bulb drawing 51156457 Vector Art at Vecteezy">
+            <a:extLst>
+              <a:ext uri="{FF2B5EF4-FFF2-40B4-BE49-F238E27FC236}">
+                <a16:creationId xmlns:a16="http://schemas.microsoft.com/office/drawing/2014/main" id="{51F5BD3C-D1DA-45C8-0C17-8FE5F92DF44B}"/>
+              </a:ext>
+            </a:extLst>
+          </p:cNvPr>
+          <p:cNvPicPr>
+            <a:picLocks noChangeAspect="1" noChangeArrowheads="1"/>
+          </p:cNvPicPr>
+          <p:nvPr/>
+        </p:nvPicPr>
+        <p:blipFill>
+          <a:blip r:embed="rId4">
+            <a:extLst>
+              <a:ext uri="{28A0092B-C50C-407E-A947-70E740481C1C}">
+                <a14:useLocalDpi xmlns:a14="http://schemas.microsoft.com/office/drawing/2010/main" val="0"/>
+              </a:ext>
+            </a:extLst>
+          </a:blip>
+          <a:srcRect/>
+          <a:stretch>
+            <a:fillRect/>
+          </a:stretch>
+        </p:blipFill>
+        <p:spPr bwMode="auto">
+          <a:xfrm>
+            <a:off x="8028087" y="607986"/>
+            <a:ext cx="1133895" cy="706844"/>
+          </a:xfrm>
+          <a:prstGeom prst="rect">
+            <a:avLst/>
+          </a:prstGeom>
+          <a:noFill/>
+          <a:extLst>
+            <a:ext uri="{909E8E84-426E-40DD-AFC4-6F175D3DCCD1}">
+              <a14:hiddenFill xmlns:a14="http://schemas.microsoft.com/office/drawing/2010/main">
+                <a:solidFill>
+                  <a:srgbClr val="FFFFFF"/>
+                </a:solidFill>
+              </a14:hiddenFill>
+            </a:ext>
+          </a:extLst>
+        </p:spPr>
+      </p:pic>
+      <p:grpSp>
+        <p:nvGrpSpPr>
+          <p:cNvPr id="24" name="Group 23">
+            <a:extLst>
+              <a:ext uri="{FF2B5EF4-FFF2-40B4-BE49-F238E27FC236}">
+                <a16:creationId xmlns:a16="http://schemas.microsoft.com/office/drawing/2014/main" id="{877F12AF-56BB-F0C4-FD12-D546204A2561}"/>
+              </a:ext>
+            </a:extLst>
+          </p:cNvPr>
+          <p:cNvGrpSpPr/>
+          <p:nvPr/>
+        </p:nvGrpSpPr>
+        <p:grpSpPr>
+          <a:xfrm>
+            <a:off x="9381355" y="579610"/>
+            <a:ext cx="872438" cy="881738"/>
+            <a:chOff x="8770838" y="560430"/>
+            <a:chExt cx="872438" cy="881738"/>
+          </a:xfrm>
+        </p:grpSpPr>
+        <p:pic>
+          <p:nvPicPr>
+            <p:cNvPr id="25" name="Picture 24" descr="Hand-drawn Vector Illustration of a Two-door Refrigerator ...">
+              <a:extLst>
+                <a:ext uri="{FF2B5EF4-FFF2-40B4-BE49-F238E27FC236}">
+                  <a16:creationId xmlns:a16="http://schemas.microsoft.com/office/drawing/2014/main" id="{78048A26-6175-94E2-945E-5BF81982EC40}"/>
+                </a:ext>
+              </a:extLst>
+            </p:cNvPr>
+            <p:cNvPicPr>
+              <a:picLocks noChangeAspect="1" noChangeArrowheads="1"/>
+            </p:cNvPicPr>
+            <p:nvPr/>
+          </p:nvPicPr>
+          <p:blipFill>
+            <a:blip r:embed="rId10">
+              <a:extLst>
+                <a:ext uri="{28A0092B-C50C-407E-A947-70E740481C1C}">
+                  <a14:useLocalDpi xmlns:a14="http://schemas.microsoft.com/office/drawing/2010/main" val="0"/>
+                </a:ext>
+              </a:extLst>
+            </a:blip>
+            <a:srcRect/>
+            <a:stretch>
+              <a:fillRect/>
+            </a:stretch>
+          </p:blipFill>
+          <p:spPr bwMode="auto">
+            <a:xfrm>
+              <a:off x="8830990" y="560430"/>
+              <a:ext cx="812286" cy="857965"/>
+            </a:xfrm>
+            <a:prstGeom prst="rect">
+              <a:avLst/>
+            </a:prstGeom>
+            <a:noFill/>
+            <a:extLst>
+              <a:ext uri="{909E8E84-426E-40DD-AFC4-6F175D3DCCD1}">
+                <a14:hiddenFill xmlns:a14="http://schemas.microsoft.com/office/drawing/2010/main">
+                  <a:solidFill>
+                    <a:srgbClr val="FFFFFF"/>
+                  </a:solidFill>
+                </a14:hiddenFill>
+              </a:ext>
+            </a:extLst>
+          </p:spPr>
+        </p:pic>
+        <p:sp>
+          <p:nvSpPr>
+            <p:cNvPr id="26" name="Rectangle 25">
+              <a:extLst>
+                <a:ext uri="{FF2B5EF4-FFF2-40B4-BE49-F238E27FC236}">
+                  <a16:creationId xmlns:a16="http://schemas.microsoft.com/office/drawing/2014/main" id="{391BBB9E-0AA6-5B60-9B6E-75C72D3436AA}"/>
+                </a:ext>
+              </a:extLst>
+            </p:cNvPr>
+            <p:cNvSpPr/>
+            <p:nvPr/>
+          </p:nvSpPr>
+          <p:spPr>
+            <a:xfrm>
+              <a:off x="8770838" y="1325587"/>
+              <a:ext cx="872438" cy="116581"/>
+            </a:xfrm>
+            <a:prstGeom prst="rect">
+              <a:avLst/>
+            </a:prstGeom>
+            <a:solidFill>
+              <a:schemeClr val="bg1"/>
+            </a:solidFill>
+            <a:ln>
+              <a:solidFill>
+                <a:schemeClr val="bg1"/>
+              </a:solidFill>
+            </a:ln>
+          </p:spPr>
+          <p:style>
+            <a:lnRef idx="2">
+              <a:schemeClr val="accent1">
+                <a:shade val="15000"/>
+              </a:schemeClr>
+            </a:lnRef>
+            <a:fillRef idx="1">
+              <a:schemeClr val="accent1"/>
+            </a:fillRef>
+            <a:effectRef idx="0">
+              <a:schemeClr val="accent1"/>
+            </a:effectRef>
+            <a:fontRef idx="minor">
+              <a:schemeClr val="lt1"/>
+            </a:fontRef>
+          </p:style>
+          <p:txBody>
+            <a:bodyPr rtlCol="0" anchor="ctr"/>
+            <a:lstStyle/>
+            <a:p>
+              <a:pPr algn="ctr"/>
+              <a:endParaRPr lang="en-SE"/>
+            </a:p>
+          </p:txBody>
+        </p:sp>
+      </p:grpSp>
+      <p:grpSp>
+        <p:nvGrpSpPr>
+          <p:cNvPr id="27" name="Group 26">
+            <a:extLst>
+              <a:ext uri="{FF2B5EF4-FFF2-40B4-BE49-F238E27FC236}">
+                <a16:creationId xmlns:a16="http://schemas.microsoft.com/office/drawing/2014/main" id="{6799E508-0BCE-2C6D-CC0C-32CAF2D370D8}"/>
+              </a:ext>
+            </a:extLst>
+          </p:cNvPr>
+          <p:cNvGrpSpPr/>
+          <p:nvPr/>
+        </p:nvGrpSpPr>
+        <p:grpSpPr>
+          <a:xfrm>
+            <a:off x="9950175" y="500417"/>
+            <a:ext cx="961089" cy="992387"/>
+            <a:chOff x="9493250" y="449781"/>
+            <a:chExt cx="961089" cy="992387"/>
+          </a:xfrm>
+        </p:grpSpPr>
+        <p:pic>
+          <p:nvPicPr>
+            <p:cNvPr id="31" name="Picture 6" descr="Hand drawn sketch of kitchen stove – Royalty-Free Vector ...">
+              <a:extLst>
+                <a:ext uri="{FF2B5EF4-FFF2-40B4-BE49-F238E27FC236}">
+                  <a16:creationId xmlns:a16="http://schemas.microsoft.com/office/drawing/2014/main" id="{528FC521-98B1-F9CD-DBBA-8263685754B2}"/>
+                </a:ext>
+              </a:extLst>
+            </p:cNvPr>
+            <p:cNvPicPr>
+              <a:picLocks noChangeAspect="1" noChangeArrowheads="1"/>
+            </p:cNvPicPr>
+            <p:nvPr/>
+          </p:nvPicPr>
+          <p:blipFill>
+            <a:blip r:embed="rId11">
+              <a:extLst>
+                <a:ext uri="{28A0092B-C50C-407E-A947-70E740481C1C}">
+                  <a14:useLocalDpi xmlns:a14="http://schemas.microsoft.com/office/drawing/2010/main" val="0"/>
+                </a:ext>
+              </a:extLst>
+            </a:blip>
+            <a:srcRect/>
+            <a:stretch>
+              <a:fillRect/>
+            </a:stretch>
+          </p:blipFill>
+          <p:spPr bwMode="auto">
+            <a:xfrm>
+              <a:off x="9552017" y="449781"/>
+              <a:ext cx="902322" cy="974508"/>
+            </a:xfrm>
+            <a:prstGeom prst="rect">
+              <a:avLst/>
+            </a:prstGeom>
+            <a:noFill/>
+            <a:extLst>
+              <a:ext uri="{909E8E84-426E-40DD-AFC4-6F175D3DCCD1}">
+                <a14:hiddenFill xmlns:a14="http://schemas.microsoft.com/office/drawing/2010/main">
+                  <a:solidFill>
+                    <a:srgbClr val="FFFFFF"/>
+                  </a:solidFill>
+                </a14:hiddenFill>
+              </a:ext>
+            </a:extLst>
+          </p:spPr>
+        </p:pic>
+        <p:sp>
+          <p:nvSpPr>
+            <p:cNvPr id="32" name="Rectangle 31">
+              <a:extLst>
+                <a:ext uri="{FF2B5EF4-FFF2-40B4-BE49-F238E27FC236}">
+                  <a16:creationId xmlns:a16="http://schemas.microsoft.com/office/drawing/2014/main" id="{7567CF10-B151-7AF0-709B-C120867E6003}"/>
+                </a:ext>
+              </a:extLst>
+            </p:cNvPr>
+            <p:cNvSpPr/>
+            <p:nvPr/>
+          </p:nvSpPr>
+          <p:spPr>
+            <a:xfrm>
+              <a:off x="9493250" y="1325587"/>
+              <a:ext cx="961089" cy="116581"/>
+            </a:xfrm>
+            <a:prstGeom prst="rect">
+              <a:avLst/>
+            </a:prstGeom>
+            <a:solidFill>
+              <a:schemeClr val="bg1"/>
+            </a:solidFill>
+            <a:ln>
+              <a:noFill/>
+            </a:ln>
+          </p:spPr>
+          <p:style>
+            <a:lnRef idx="2">
+              <a:schemeClr val="accent1">
+                <a:shade val="15000"/>
+              </a:schemeClr>
+            </a:lnRef>
+            <a:fillRef idx="1">
+              <a:schemeClr val="accent1"/>
+            </a:fillRef>
+            <a:effectRef idx="0">
+              <a:schemeClr val="accent1"/>
+            </a:effectRef>
+            <a:fontRef idx="minor">
+              <a:schemeClr val="lt1"/>
+            </a:fontRef>
+          </p:style>
+          <p:txBody>
+            <a:bodyPr rtlCol="0" anchor="ctr"/>
+            <a:lstStyle/>
+            <a:p>
+              <a:pPr algn="ctr"/>
+              <a:endParaRPr lang="en-SE"/>
+            </a:p>
+          </p:txBody>
+        </p:sp>
+      </p:grpSp>
+      <p:pic>
+        <p:nvPicPr>
+          <p:cNvPr id="33" name="Picture 8" descr="Sketch Empty electric socket. Cartoon, hand drawn unplugged european wall outlet. Cartoon, hand drawn unplugged european wall outlet , sketch style, isolated on white background.">
+            <a:extLst>
+              <a:ext uri="{FF2B5EF4-FFF2-40B4-BE49-F238E27FC236}">
+                <a16:creationId xmlns:a16="http://schemas.microsoft.com/office/drawing/2014/main" id="{B9D87FF3-8E39-5CB5-8825-C669A22F5C82}"/>
+              </a:ext>
+            </a:extLst>
+          </p:cNvPr>
+          <p:cNvPicPr>
+            <a:picLocks noChangeAspect="1" noChangeArrowheads="1"/>
+          </p:cNvPicPr>
+          <p:nvPr/>
+        </p:nvPicPr>
+        <p:blipFill>
+          <a:blip r:embed="rId12">
+            <a:extLst>
+              <a:ext uri="{28A0092B-C50C-407E-A947-70E740481C1C}">
+                <a14:useLocalDpi xmlns:a14="http://schemas.microsoft.com/office/drawing/2010/main" val="0"/>
+              </a:ext>
+            </a:extLst>
+          </a:blip>
+          <a:srcRect/>
+          <a:stretch>
+            <a:fillRect/>
+          </a:stretch>
+        </p:blipFill>
+        <p:spPr bwMode="auto">
+          <a:xfrm rot="5400000">
+            <a:off x="8814606" y="569269"/>
+            <a:ext cx="812286" cy="812286"/>
+          </a:xfrm>
+          <a:prstGeom prst="rect">
+            <a:avLst/>
+          </a:prstGeom>
+          <a:noFill/>
+          <a:extLst>
+            <a:ext uri="{909E8E84-426E-40DD-AFC4-6F175D3DCCD1}">
+              <a14:hiddenFill xmlns:a14="http://schemas.microsoft.com/office/drawing/2010/main">
+                <a:solidFill>
+                  <a:srgbClr val="FFFFFF"/>
+                </a:solidFill>
+              </a14:hiddenFill>
+            </a:ext>
+          </a:extLst>
+        </p:spPr>
+      </p:pic>
     </p:spTree>
     <p:extLst>
       <p:ext uri="{BB962C8B-B14F-4D97-AF65-F5344CB8AC3E}">
@@ -9349,10 +10612,10 @@
       </p:cxnSp>
       <p:pic>
         <p:nvPicPr>
-          <p:cNvPr id="1064" name="Picture 8" descr="Minimalist light bulb drawing 51156457 Vector Art at Vecteezy">
-            <a:extLst>
-              <a:ext uri="{FF2B5EF4-FFF2-40B4-BE49-F238E27FC236}">
-                <a16:creationId xmlns:a16="http://schemas.microsoft.com/office/drawing/2014/main" id="{ECE9B160-1842-4120-6A09-999194F024D6}"/>
+          <p:cNvPr id="1065" name="Picture 10" descr="Radiator Drawing Home Stock Illustrations – 430 Radiator ...">
+            <a:extLst>
+              <a:ext uri="{FF2B5EF4-FFF2-40B4-BE49-F238E27FC236}">
+                <a16:creationId xmlns:a16="http://schemas.microsoft.com/office/drawing/2014/main" id="{F7DC43DE-A122-17C6-27D7-F0818014E3D4}"/>
               </a:ext>
             </a:extLst>
           </p:cNvPr>
@@ -9376,8 +10639,8 @@
         </p:blipFill>
         <p:spPr bwMode="auto">
           <a:xfrm>
-            <a:off x="9143889" y="530332"/>
-            <a:ext cx="1413837" cy="881353"/>
+            <a:off x="8908309" y="1442168"/>
+            <a:ext cx="1884998" cy="1884998"/>
           </a:xfrm>
           <a:prstGeom prst="rect">
             <a:avLst/>
@@ -9396,10 +10659,10 @@
       </p:pic>
       <p:pic>
         <p:nvPicPr>
-          <p:cNvPr id="1065" name="Picture 10" descr="Radiator Drawing Home Stock Illustrations – 430 Radiator ...">
-            <a:extLst>
-              <a:ext uri="{FF2B5EF4-FFF2-40B4-BE49-F238E27FC236}">
-                <a16:creationId xmlns:a16="http://schemas.microsoft.com/office/drawing/2014/main" id="{F7DC43DE-A122-17C6-27D7-F0818014E3D4}"/>
+          <p:cNvPr id="1066" name="Picture 12" descr="Water Heater Drawing Stock Illustrations – 624 Water Heater ...">
+            <a:extLst>
+              <a:ext uri="{FF2B5EF4-FFF2-40B4-BE49-F238E27FC236}">
+                <a16:creationId xmlns:a16="http://schemas.microsoft.com/office/drawing/2014/main" id="{25DC281B-8FA0-28EC-FDD6-3C4014303D86}"/>
               </a:ext>
             </a:extLst>
           </p:cNvPr>
@@ -9423,8 +10686,8 @@
         </p:blipFill>
         <p:spPr bwMode="auto">
           <a:xfrm>
-            <a:off x="8908309" y="1442168"/>
-            <a:ext cx="1884998" cy="1884998"/>
+            <a:off x="8929712" y="3034979"/>
+            <a:ext cx="1859279" cy="1859279"/>
           </a:xfrm>
           <a:prstGeom prst="rect">
             <a:avLst/>
@@ -9443,10 +10706,10 @@
       </p:pic>
       <p:pic>
         <p:nvPicPr>
-          <p:cNvPr id="1066" name="Picture 12" descr="Water Heater Drawing Stock Illustrations – 624 Water Heater ...">
-            <a:extLst>
-              <a:ext uri="{FF2B5EF4-FFF2-40B4-BE49-F238E27FC236}">
-                <a16:creationId xmlns:a16="http://schemas.microsoft.com/office/drawing/2014/main" id="{25DC281B-8FA0-28EC-FDD6-3C4014303D86}"/>
+          <p:cNvPr id="1067" name="Picture 14" descr="Hand-drawn black-and-white sketch of electro car and car charger. Realistic  electromobile charging station. Alternative fuel. Doodle vector  illustration. Vintage. 29763485 Vector Art at Vecteezy">
+            <a:extLst>
+              <a:ext uri="{FF2B5EF4-FFF2-40B4-BE49-F238E27FC236}">
+                <a16:creationId xmlns:a16="http://schemas.microsoft.com/office/drawing/2014/main" id="{D4985708-A96B-CCFE-3364-A7900270355C}"/>
               </a:ext>
             </a:extLst>
           </p:cNvPr>
@@ -9469,9 +10732,9 @@
           </a:stretch>
         </p:blipFill>
         <p:spPr bwMode="auto">
-          <a:xfrm>
-            <a:off x="8929712" y="3034979"/>
-            <a:ext cx="1859279" cy="1859279"/>
+          <a:xfrm flipH="1">
+            <a:off x="8630336" y="4836969"/>
+            <a:ext cx="2440940" cy="1830387"/>
           </a:xfrm>
           <a:prstGeom prst="rect">
             <a:avLst/>
@@ -9488,53 +10751,6 @@
           </a:extLst>
         </p:spPr>
       </p:pic>
-      <p:pic>
-        <p:nvPicPr>
-          <p:cNvPr id="1067" name="Picture 14" descr="Hand-drawn black-and-white sketch of electro car and car charger. Realistic  electromobile charging station. Alternative fuel. Doodle vector  illustration. Vintage. 29763485 Vector Art at Vecteezy">
-            <a:extLst>
-              <a:ext uri="{FF2B5EF4-FFF2-40B4-BE49-F238E27FC236}">
-                <a16:creationId xmlns:a16="http://schemas.microsoft.com/office/drawing/2014/main" id="{D4985708-A96B-CCFE-3364-A7900270355C}"/>
-              </a:ext>
-            </a:extLst>
-          </p:cNvPr>
-          <p:cNvPicPr>
-            <a:picLocks noChangeAspect="1" noChangeArrowheads="1"/>
-          </p:cNvPicPr>
-          <p:nvPr/>
-        </p:nvPicPr>
-        <p:blipFill>
-          <a:blip r:embed="rId7">
-            <a:extLst>
-              <a:ext uri="{28A0092B-C50C-407E-A947-70E740481C1C}">
-                <a14:useLocalDpi xmlns:a14="http://schemas.microsoft.com/office/drawing/2010/main" val="0"/>
-              </a:ext>
-            </a:extLst>
-          </a:blip>
-          <a:srcRect/>
-          <a:stretch>
-            <a:fillRect/>
-          </a:stretch>
-        </p:blipFill>
-        <p:spPr bwMode="auto">
-          <a:xfrm flipH="1">
-            <a:off x="8630336" y="4836969"/>
-            <a:ext cx="2440940" cy="1830387"/>
-          </a:xfrm>
-          <a:prstGeom prst="rect">
-            <a:avLst/>
-          </a:prstGeom>
-          <a:noFill/>
-          <a:extLst>
-            <a:ext uri="{909E8E84-426E-40DD-AFC4-6F175D3DCCD1}">
-              <a14:hiddenFill xmlns:a14="http://schemas.microsoft.com/office/drawing/2010/main">
-                <a:solidFill>
-                  <a:srgbClr val="FFFFFF"/>
-                </a:solidFill>
-              </a14:hiddenFill>
-            </a:ext>
-          </a:extLst>
-        </p:spPr>
-      </p:pic>
       <p:cxnSp>
         <p:nvCxnSpPr>
           <p:cNvPr id="1069" name="Straight Connector 1068">
@@ -9590,7 +10806,7 @@
         <p:spPr>
           <a:xfrm>
             <a:off x="7014342" y="978735"/>
-            <a:ext cx="2430223" cy="0"/>
+            <a:ext cx="1227958" cy="0"/>
           </a:xfrm>
           <a:prstGeom prst="line">
             <a:avLst/>
@@ -10024,7 +11240,7 @@
           <p:nvPr/>
         </p:nvPicPr>
         <p:blipFill>
-          <a:blip r:embed="rId8">
+          <a:blip r:embed="rId7">
             <a:extLst>
               <a:ext uri="{28A0092B-C50C-407E-A947-70E740481C1C}">
                 <a14:useLocalDpi xmlns:a14="http://schemas.microsoft.com/office/drawing/2010/main" val="0"/>
@@ -10071,7 +11287,7 @@
           <p:nvPr/>
         </p:nvPicPr>
         <p:blipFill>
-          <a:blip r:embed="rId9"/>
+          <a:blip r:embed="rId8"/>
           <a:stretch>
             <a:fillRect/>
           </a:stretch>
@@ -10101,7 +11317,7 @@
           <p:nvPr/>
         </p:nvPicPr>
         <p:blipFill>
-          <a:blip r:embed="rId9"/>
+          <a:blip r:embed="rId8"/>
           <a:stretch>
             <a:fillRect/>
           </a:stretch>
@@ -10131,7 +11347,7 @@
           <p:nvPr/>
         </p:nvPicPr>
         <p:blipFill>
-          <a:blip r:embed="rId9"/>
+          <a:blip r:embed="rId8"/>
           <a:stretch>
             <a:fillRect/>
           </a:stretch>
@@ -10161,14 +11377,14 @@
           <p:nvPr/>
         </p:nvPicPr>
         <p:blipFill>
-          <a:blip r:embed="rId9"/>
+          <a:blip r:embed="rId8"/>
           <a:stretch>
             <a:fillRect/>
           </a:stretch>
         </p:blipFill>
         <p:spPr>
           <a:xfrm>
-            <a:off x="5236244" y="3954970"/>
+            <a:off x="4887962" y="3984384"/>
             <a:ext cx="571529" cy="444523"/>
           </a:xfrm>
           <a:prstGeom prst="rect">
@@ -10187,14 +11403,14 @@
           </p:cNvPr>
           <p:cNvCxnSpPr>
             <a:cxnSpLocks/>
-            <a:stCxn id="1056" idx="2"/>
+            <a:stCxn id="1056" idx="0"/>
           </p:cNvCxnSpPr>
           <p:nvPr/>
         </p:nvCxnSpPr>
         <p:spPr>
           <a:xfrm flipH="1" flipV="1">
-            <a:off x="4839688" y="1181894"/>
-            <a:ext cx="682321" cy="3217599"/>
+            <a:off x="4861378" y="1214702"/>
+            <a:ext cx="312349" cy="2769682"/>
           </a:xfrm>
           <a:prstGeom prst="line">
             <a:avLst/>
@@ -10232,14 +11448,14 @@
           </p:cNvPr>
           <p:cNvCxnSpPr>
             <a:cxnSpLocks/>
-            <a:stCxn id="1049" idx="2"/>
+            <a:stCxn id="1049" idx="0"/>
           </p:cNvCxnSpPr>
           <p:nvPr/>
         </p:nvCxnSpPr>
         <p:spPr>
           <a:xfrm flipH="1" flipV="1">
             <a:off x="4879149" y="1181894"/>
-            <a:ext cx="3248979" cy="879495"/>
+            <a:ext cx="3248979" cy="434972"/>
           </a:xfrm>
           <a:prstGeom prst="line">
             <a:avLst/>
@@ -10277,14 +11493,13 @@
           </p:cNvPr>
           <p:cNvCxnSpPr>
             <a:cxnSpLocks/>
-            <a:stCxn id="1048" idx="2"/>
           </p:cNvCxnSpPr>
           <p:nvPr/>
         </p:nvCxnSpPr>
         <p:spPr>
           <a:xfrm flipH="1" flipV="1">
             <a:off x="4834009" y="1172343"/>
-            <a:ext cx="3294262" cy="2591947"/>
+            <a:ext cx="3294119" cy="2154823"/>
           </a:xfrm>
           <a:prstGeom prst="line">
             <a:avLst/>
@@ -10322,14 +11537,13 @@
           </p:cNvPr>
           <p:cNvCxnSpPr>
             <a:cxnSpLocks/>
-            <a:stCxn id="1053" idx="2"/>
           </p:cNvCxnSpPr>
           <p:nvPr/>
         </p:nvCxnSpPr>
         <p:spPr>
           <a:xfrm flipH="1" flipV="1">
             <a:off x="4834009" y="1181894"/>
-            <a:ext cx="3314539" cy="4279298"/>
+            <a:ext cx="3314539" cy="3834775"/>
           </a:xfrm>
           <a:prstGeom prst="line">
             <a:avLst/>
@@ -10618,25 +11832,29 @@
             <a:p>
               <a:pPr algn="ctr"/>
               <a:r>
-                <a:rPr lang="en-US" sz="1400" dirty="0">
+                <a:rPr lang="en-US" sz="1100" dirty="0" err="1">
                   <a:solidFill>
                     <a:schemeClr val="tx1"/>
                   </a:solidFill>
                 </a:rPr>
-                <a:t>Load price</a:t>
+                <a:t>Auromation</a:t>
               </a:r>
-            </a:p>
-            <a:p>
-              <a:pPr algn="ctr"/>
-              <a:r>
-                <a:rPr lang="en-US" sz="1400" dirty="0">
+              <a:br>
+                <a:rPr lang="en-US" sz="1100" dirty="0">
                   <a:solidFill>
                     <a:schemeClr val="tx1"/>
                   </a:solidFill>
                 </a:rPr>
-                <a:t>optimizer</a:t>
+              </a:br>
+              <a:r>
+                <a:rPr lang="en-US" sz="1100" dirty="0">
+                  <a:solidFill>
+                    <a:schemeClr val="tx1"/>
+                  </a:solidFill>
+                </a:rPr>
+                <a:t>entity</a:t>
               </a:r>
-              <a:endParaRPr lang="en-SE" sz="1400" dirty="0">
+              <a:endParaRPr lang="en-SE" sz="1100" dirty="0">
                 <a:solidFill>
                   <a:schemeClr val="tx1"/>
                 </a:solidFill>
@@ -10701,14 +11919,13 @@
           <p:cNvCxnSpPr>
             <a:cxnSpLocks/>
             <a:stCxn id="4" idx="0"/>
-            <a:endCxn id="42" idx="0"/>
           </p:cNvCxnSpPr>
           <p:nvPr/>
         </p:nvCxnSpPr>
         <p:spPr>
           <a:xfrm flipV="1">
-            <a:off x="4879410" y="2072547"/>
-            <a:ext cx="3250540" cy="2634725"/>
+            <a:off x="4879410" y="2525117"/>
+            <a:ext cx="2962953" cy="2182155"/>
           </a:xfrm>
           <a:prstGeom prst="line">
             <a:avLst/>
@@ -10746,14 +11963,13 @@
           <p:cNvCxnSpPr>
             <a:cxnSpLocks/>
             <a:stCxn id="4" idx="0"/>
-            <a:endCxn id="1048" idx="2"/>
           </p:cNvCxnSpPr>
           <p:nvPr/>
         </p:nvCxnSpPr>
         <p:spPr>
           <a:xfrm flipV="1">
-            <a:off x="4879410" y="3764290"/>
-            <a:ext cx="3248861" cy="942982"/>
+            <a:off x="4879410" y="4215865"/>
+            <a:ext cx="2962953" cy="491407"/>
           </a:xfrm>
           <a:prstGeom prst="line">
             <a:avLst/>
@@ -10791,14 +12007,13 @@
           <p:cNvCxnSpPr>
             <a:cxnSpLocks/>
             <a:stCxn id="4" idx="0"/>
-            <a:endCxn id="1053" idx="2"/>
           </p:cNvCxnSpPr>
           <p:nvPr/>
         </p:nvCxnSpPr>
         <p:spPr>
           <a:xfrm>
             <a:off x="4879410" y="4707272"/>
-            <a:ext cx="3269138" cy="753920"/>
+            <a:ext cx="2962953" cy="894631"/>
           </a:xfrm>
           <a:prstGeom prst="line">
             <a:avLst/>
@@ -10886,8 +12101,8 @@
         </p:nvCxnSpPr>
         <p:spPr>
           <a:xfrm flipV="1">
-            <a:off x="2298051" y="1181006"/>
-            <a:ext cx="2560821" cy="954830"/>
+            <a:off x="2298051" y="1181894"/>
+            <a:ext cx="2589911" cy="953942"/>
           </a:xfrm>
           <a:prstGeom prst="line">
             <a:avLst/>
@@ -10998,6 +12213,618 @@
             <a:avLst/>
           </a:prstGeom>
           <a:ln>
+            <a:solidFill>
+              <a:srgbClr val="FF0000"/>
+            </a:solidFill>
+          </a:ln>
+        </p:spPr>
+        <p:style>
+          <a:lnRef idx="2">
+            <a:schemeClr val="accent1"/>
+          </a:lnRef>
+          <a:fillRef idx="0">
+            <a:schemeClr val="accent1"/>
+          </a:fillRef>
+          <a:effectRef idx="1">
+            <a:schemeClr val="accent1"/>
+          </a:effectRef>
+          <a:fontRef idx="minor">
+            <a:schemeClr val="tx1"/>
+          </a:fontRef>
+        </p:style>
+      </p:cxnSp>
+      <p:pic>
+        <p:nvPicPr>
+          <p:cNvPr id="31" name="Picture 8" descr="Minimalist light bulb drawing 51156457 Vector Art at Vecteezy">
+            <a:extLst>
+              <a:ext uri="{FF2B5EF4-FFF2-40B4-BE49-F238E27FC236}">
+                <a16:creationId xmlns:a16="http://schemas.microsoft.com/office/drawing/2014/main" id="{2A9FF903-6884-570A-2EB1-2F485B61760D}"/>
+              </a:ext>
+            </a:extLst>
+          </p:cNvPr>
+          <p:cNvPicPr>
+            <a:picLocks noChangeAspect="1" noChangeArrowheads="1"/>
+          </p:cNvPicPr>
+          <p:nvPr/>
+        </p:nvPicPr>
+        <p:blipFill>
+          <a:blip r:embed="rId9">
+            <a:extLst>
+              <a:ext uri="{28A0092B-C50C-407E-A947-70E740481C1C}">
+                <a14:useLocalDpi xmlns:a14="http://schemas.microsoft.com/office/drawing/2010/main" val="0"/>
+              </a:ext>
+            </a:extLst>
+          </a:blip>
+          <a:srcRect/>
+          <a:stretch>
+            <a:fillRect/>
+          </a:stretch>
+        </p:blipFill>
+        <p:spPr bwMode="auto">
+          <a:xfrm>
+            <a:off x="8028087" y="607986"/>
+            <a:ext cx="1133895" cy="706844"/>
+          </a:xfrm>
+          <a:prstGeom prst="rect">
+            <a:avLst/>
+          </a:prstGeom>
+          <a:noFill/>
+          <a:extLst>
+            <a:ext uri="{909E8E84-426E-40DD-AFC4-6F175D3DCCD1}">
+              <a14:hiddenFill xmlns:a14="http://schemas.microsoft.com/office/drawing/2010/main">
+                <a:solidFill>
+                  <a:srgbClr val="FFFFFF"/>
+                </a:solidFill>
+              </a14:hiddenFill>
+            </a:ext>
+          </a:extLst>
+        </p:spPr>
+      </p:pic>
+      <p:grpSp>
+        <p:nvGrpSpPr>
+          <p:cNvPr id="33" name="Group 32">
+            <a:extLst>
+              <a:ext uri="{FF2B5EF4-FFF2-40B4-BE49-F238E27FC236}">
+                <a16:creationId xmlns:a16="http://schemas.microsoft.com/office/drawing/2014/main" id="{07DC100D-9B6D-2210-242D-DE5605950618}"/>
+              </a:ext>
+            </a:extLst>
+          </p:cNvPr>
+          <p:cNvGrpSpPr/>
+          <p:nvPr/>
+        </p:nvGrpSpPr>
+        <p:grpSpPr>
+          <a:xfrm>
+            <a:off x="9381355" y="579610"/>
+            <a:ext cx="872438" cy="881738"/>
+            <a:chOff x="8770838" y="560430"/>
+            <a:chExt cx="872438" cy="881738"/>
+          </a:xfrm>
+        </p:grpSpPr>
+        <p:pic>
+          <p:nvPicPr>
+            <p:cNvPr id="37" name="Picture 36" descr="Hand-drawn Vector Illustration of a Two-door Refrigerator ...">
+              <a:extLst>
+                <a:ext uri="{FF2B5EF4-FFF2-40B4-BE49-F238E27FC236}">
+                  <a16:creationId xmlns:a16="http://schemas.microsoft.com/office/drawing/2014/main" id="{6103750E-F7EC-B13C-5EE5-F73B45538F17}"/>
+                </a:ext>
+              </a:extLst>
+            </p:cNvPr>
+            <p:cNvPicPr>
+              <a:picLocks noChangeAspect="1" noChangeArrowheads="1"/>
+            </p:cNvPicPr>
+            <p:nvPr/>
+          </p:nvPicPr>
+          <p:blipFill>
+            <a:blip r:embed="rId10">
+              <a:extLst>
+                <a:ext uri="{28A0092B-C50C-407E-A947-70E740481C1C}">
+                  <a14:useLocalDpi xmlns:a14="http://schemas.microsoft.com/office/drawing/2010/main" val="0"/>
+                </a:ext>
+              </a:extLst>
+            </a:blip>
+            <a:srcRect/>
+            <a:stretch>
+              <a:fillRect/>
+            </a:stretch>
+          </p:blipFill>
+          <p:spPr bwMode="auto">
+            <a:xfrm>
+              <a:off x="8830990" y="560430"/>
+              <a:ext cx="812286" cy="857965"/>
+            </a:xfrm>
+            <a:prstGeom prst="rect">
+              <a:avLst/>
+            </a:prstGeom>
+            <a:noFill/>
+            <a:extLst>
+              <a:ext uri="{909E8E84-426E-40DD-AFC4-6F175D3DCCD1}">
+                <a14:hiddenFill xmlns:a14="http://schemas.microsoft.com/office/drawing/2010/main">
+                  <a:solidFill>
+                    <a:srgbClr val="FFFFFF"/>
+                  </a:solidFill>
+                </a14:hiddenFill>
+              </a:ext>
+            </a:extLst>
+          </p:spPr>
+        </p:pic>
+        <p:sp>
+          <p:nvSpPr>
+            <p:cNvPr id="38" name="Rectangle 37">
+              <a:extLst>
+                <a:ext uri="{FF2B5EF4-FFF2-40B4-BE49-F238E27FC236}">
+                  <a16:creationId xmlns:a16="http://schemas.microsoft.com/office/drawing/2014/main" id="{0294AC9C-4742-B280-96C1-AD5E1276A319}"/>
+                </a:ext>
+              </a:extLst>
+            </p:cNvPr>
+            <p:cNvSpPr/>
+            <p:nvPr/>
+          </p:nvSpPr>
+          <p:spPr>
+            <a:xfrm>
+              <a:off x="8770838" y="1325587"/>
+              <a:ext cx="872438" cy="116581"/>
+            </a:xfrm>
+            <a:prstGeom prst="rect">
+              <a:avLst/>
+            </a:prstGeom>
+            <a:solidFill>
+              <a:schemeClr val="bg1"/>
+            </a:solidFill>
+            <a:ln>
+              <a:solidFill>
+                <a:schemeClr val="bg1"/>
+              </a:solidFill>
+            </a:ln>
+          </p:spPr>
+          <p:style>
+            <a:lnRef idx="2">
+              <a:schemeClr val="accent1">
+                <a:shade val="15000"/>
+              </a:schemeClr>
+            </a:lnRef>
+            <a:fillRef idx="1">
+              <a:schemeClr val="accent1"/>
+            </a:fillRef>
+            <a:effectRef idx="0">
+              <a:schemeClr val="accent1"/>
+            </a:effectRef>
+            <a:fontRef idx="minor">
+              <a:schemeClr val="lt1"/>
+            </a:fontRef>
+          </p:style>
+          <p:txBody>
+            <a:bodyPr rtlCol="0" anchor="ctr"/>
+            <a:lstStyle/>
+            <a:p>
+              <a:pPr algn="ctr"/>
+              <a:endParaRPr lang="en-SE"/>
+            </a:p>
+          </p:txBody>
+        </p:sp>
+      </p:grpSp>
+      <p:grpSp>
+        <p:nvGrpSpPr>
+          <p:cNvPr id="40" name="Group 39">
+            <a:extLst>
+              <a:ext uri="{FF2B5EF4-FFF2-40B4-BE49-F238E27FC236}">
+                <a16:creationId xmlns:a16="http://schemas.microsoft.com/office/drawing/2014/main" id="{3CF37AF3-025A-B04B-9B37-0E1194404FD0}"/>
+              </a:ext>
+            </a:extLst>
+          </p:cNvPr>
+          <p:cNvGrpSpPr/>
+          <p:nvPr/>
+        </p:nvGrpSpPr>
+        <p:grpSpPr>
+          <a:xfrm>
+            <a:off x="9950175" y="500417"/>
+            <a:ext cx="961089" cy="992387"/>
+            <a:chOff x="9493250" y="449781"/>
+            <a:chExt cx="961089" cy="992387"/>
+          </a:xfrm>
+        </p:grpSpPr>
+        <p:pic>
+          <p:nvPicPr>
+            <p:cNvPr id="41" name="Picture 6" descr="Hand drawn sketch of kitchen stove – Royalty-Free Vector ...">
+              <a:extLst>
+                <a:ext uri="{FF2B5EF4-FFF2-40B4-BE49-F238E27FC236}">
+                  <a16:creationId xmlns:a16="http://schemas.microsoft.com/office/drawing/2014/main" id="{A1315B5B-56F0-8792-3D5A-C69B57D7B201}"/>
+                </a:ext>
+              </a:extLst>
+            </p:cNvPr>
+            <p:cNvPicPr>
+              <a:picLocks noChangeAspect="1" noChangeArrowheads="1"/>
+            </p:cNvPicPr>
+            <p:nvPr/>
+          </p:nvPicPr>
+          <p:blipFill>
+            <a:blip r:embed="rId11">
+              <a:extLst>
+                <a:ext uri="{28A0092B-C50C-407E-A947-70E740481C1C}">
+                  <a14:useLocalDpi xmlns:a14="http://schemas.microsoft.com/office/drawing/2010/main" val="0"/>
+                </a:ext>
+              </a:extLst>
+            </a:blip>
+            <a:srcRect/>
+            <a:stretch>
+              <a:fillRect/>
+            </a:stretch>
+          </p:blipFill>
+          <p:spPr bwMode="auto">
+            <a:xfrm>
+              <a:off x="9552017" y="449781"/>
+              <a:ext cx="902322" cy="974508"/>
+            </a:xfrm>
+            <a:prstGeom prst="rect">
+              <a:avLst/>
+            </a:prstGeom>
+            <a:noFill/>
+            <a:extLst>
+              <a:ext uri="{909E8E84-426E-40DD-AFC4-6F175D3DCCD1}">
+                <a14:hiddenFill xmlns:a14="http://schemas.microsoft.com/office/drawing/2010/main">
+                  <a:solidFill>
+                    <a:srgbClr val="FFFFFF"/>
+                  </a:solidFill>
+                </a14:hiddenFill>
+              </a:ext>
+            </a:extLst>
+          </p:spPr>
+        </p:pic>
+        <p:sp>
+          <p:nvSpPr>
+            <p:cNvPr id="46" name="Rectangle 45">
+              <a:extLst>
+                <a:ext uri="{FF2B5EF4-FFF2-40B4-BE49-F238E27FC236}">
+                  <a16:creationId xmlns:a16="http://schemas.microsoft.com/office/drawing/2014/main" id="{2BEB76C9-7675-2817-0D5A-7DE943703697}"/>
+                </a:ext>
+              </a:extLst>
+            </p:cNvPr>
+            <p:cNvSpPr/>
+            <p:nvPr/>
+          </p:nvSpPr>
+          <p:spPr>
+            <a:xfrm>
+              <a:off x="9493250" y="1325587"/>
+              <a:ext cx="961089" cy="116581"/>
+            </a:xfrm>
+            <a:prstGeom prst="rect">
+              <a:avLst/>
+            </a:prstGeom>
+            <a:solidFill>
+              <a:schemeClr val="bg1"/>
+            </a:solidFill>
+            <a:ln>
+              <a:noFill/>
+            </a:ln>
+          </p:spPr>
+          <p:style>
+            <a:lnRef idx="2">
+              <a:schemeClr val="accent1">
+                <a:shade val="15000"/>
+              </a:schemeClr>
+            </a:lnRef>
+            <a:fillRef idx="1">
+              <a:schemeClr val="accent1"/>
+            </a:fillRef>
+            <a:effectRef idx="0">
+              <a:schemeClr val="accent1"/>
+            </a:effectRef>
+            <a:fontRef idx="minor">
+              <a:schemeClr val="lt1"/>
+            </a:fontRef>
+          </p:style>
+          <p:txBody>
+            <a:bodyPr rtlCol="0" anchor="ctr"/>
+            <a:lstStyle/>
+            <a:p>
+              <a:pPr algn="ctr"/>
+              <a:endParaRPr lang="en-SE"/>
+            </a:p>
+          </p:txBody>
+        </p:sp>
+      </p:grpSp>
+      <p:pic>
+        <p:nvPicPr>
+          <p:cNvPr id="48" name="Picture 8" descr="Sketch Empty electric socket. Cartoon, hand drawn unplugged european wall outlet. Cartoon, hand drawn unplugged european wall outlet , sketch style, isolated on white background.">
+            <a:extLst>
+              <a:ext uri="{FF2B5EF4-FFF2-40B4-BE49-F238E27FC236}">
+                <a16:creationId xmlns:a16="http://schemas.microsoft.com/office/drawing/2014/main" id="{6F32A148-9989-D614-1C25-5C98C3609B30}"/>
+              </a:ext>
+            </a:extLst>
+          </p:cNvPr>
+          <p:cNvPicPr>
+            <a:picLocks noChangeAspect="1" noChangeArrowheads="1"/>
+          </p:cNvPicPr>
+          <p:nvPr/>
+        </p:nvPicPr>
+        <p:blipFill>
+          <a:blip r:embed="rId12">
+            <a:extLst>
+              <a:ext uri="{28A0092B-C50C-407E-A947-70E740481C1C}">
+                <a14:useLocalDpi xmlns:a14="http://schemas.microsoft.com/office/drawing/2010/main" val="0"/>
+              </a:ext>
+            </a:extLst>
+          </a:blip>
+          <a:srcRect/>
+          <a:stretch>
+            <a:fillRect/>
+          </a:stretch>
+        </p:blipFill>
+        <p:spPr bwMode="auto">
+          <a:xfrm rot="5400000">
+            <a:off x="8814606" y="569269"/>
+            <a:ext cx="812286" cy="812286"/>
+          </a:xfrm>
+          <a:prstGeom prst="rect">
+            <a:avLst/>
+          </a:prstGeom>
+          <a:noFill/>
+          <a:extLst>
+            <a:ext uri="{909E8E84-426E-40DD-AFC4-6F175D3DCCD1}">
+              <a14:hiddenFill xmlns:a14="http://schemas.microsoft.com/office/drawing/2010/main">
+                <a:solidFill>
+                  <a:srgbClr val="FFFFFF"/>
+                </a:solidFill>
+              </a14:hiddenFill>
+            </a:ext>
+          </a:extLst>
+        </p:spPr>
+      </p:pic>
+      <p:sp>
+        <p:nvSpPr>
+          <p:cNvPr id="60" name="TextBox 59">
+            <a:extLst>
+              <a:ext uri="{FF2B5EF4-FFF2-40B4-BE49-F238E27FC236}">
+                <a16:creationId xmlns:a16="http://schemas.microsoft.com/office/drawing/2014/main" id="{1E1F29E9-CEFC-29C8-A850-648A9AE769A4}"/>
+              </a:ext>
+            </a:extLst>
+          </p:cNvPr>
+          <p:cNvSpPr txBox="1"/>
+          <p:nvPr/>
+        </p:nvSpPr>
+        <p:spPr>
+          <a:xfrm>
+            <a:off x="10930778" y="769642"/>
+            <a:ext cx="904671" cy="369332"/>
+          </a:xfrm>
+          <a:prstGeom prst="rect">
+            <a:avLst/>
+          </a:prstGeom>
+          <a:noFill/>
+        </p:spPr>
+        <p:txBody>
+          <a:bodyPr wrap="none" rtlCol="0">
+            <a:spAutoFit/>
+          </a:bodyPr>
+          <a:lstStyle/>
+          <a:p>
+            <a:r>
+              <a:rPr lang="en-US" b="1" dirty="0"/>
+              <a:t>Prio: -1</a:t>
+            </a:r>
+            <a:endParaRPr lang="en-SE" b="1" dirty="0"/>
+          </a:p>
+        </p:txBody>
+      </p:sp>
+      <p:sp>
+        <p:nvSpPr>
+          <p:cNvPr id="61" name="TextBox 60">
+            <a:extLst>
+              <a:ext uri="{FF2B5EF4-FFF2-40B4-BE49-F238E27FC236}">
+                <a16:creationId xmlns:a16="http://schemas.microsoft.com/office/drawing/2014/main" id="{2F4BFFA2-8471-6B08-7F21-828DE229A08C}"/>
+              </a:ext>
+            </a:extLst>
+          </p:cNvPr>
+          <p:cNvSpPr txBox="1"/>
+          <p:nvPr/>
+        </p:nvSpPr>
+        <p:spPr>
+          <a:xfrm>
+            <a:off x="10930778" y="2235491"/>
+            <a:ext cx="841256" cy="369332"/>
+          </a:xfrm>
+          <a:prstGeom prst="rect">
+            <a:avLst/>
+          </a:prstGeom>
+          <a:noFill/>
+        </p:spPr>
+        <p:txBody>
+          <a:bodyPr wrap="none" rtlCol="0">
+            <a:spAutoFit/>
+          </a:bodyPr>
+          <a:lstStyle/>
+          <a:p>
+            <a:r>
+              <a:rPr lang="en-US" b="1" dirty="0"/>
+              <a:t>Prio: 0</a:t>
+            </a:r>
+            <a:endParaRPr lang="en-SE" b="1" dirty="0"/>
+          </a:p>
+        </p:txBody>
+      </p:sp>
+      <p:sp>
+        <p:nvSpPr>
+          <p:cNvPr id="1024" name="TextBox 1023">
+            <a:extLst>
+              <a:ext uri="{FF2B5EF4-FFF2-40B4-BE49-F238E27FC236}">
+                <a16:creationId xmlns:a16="http://schemas.microsoft.com/office/drawing/2014/main" id="{8343F0F4-FA83-5452-B544-4D2368288202}"/>
+              </a:ext>
+            </a:extLst>
+          </p:cNvPr>
+          <p:cNvSpPr txBox="1"/>
+          <p:nvPr/>
+        </p:nvSpPr>
+        <p:spPr>
+          <a:xfrm>
+            <a:off x="10930778" y="3842728"/>
+            <a:ext cx="841256" cy="369332"/>
+          </a:xfrm>
+          <a:prstGeom prst="rect">
+            <a:avLst/>
+          </a:prstGeom>
+          <a:noFill/>
+        </p:spPr>
+        <p:txBody>
+          <a:bodyPr wrap="none" rtlCol="0">
+            <a:spAutoFit/>
+          </a:bodyPr>
+          <a:lstStyle/>
+          <a:p>
+            <a:r>
+              <a:rPr lang="en-US" b="1" dirty="0"/>
+              <a:t>Prio: 1</a:t>
+            </a:r>
+            <a:endParaRPr lang="en-SE" b="1" dirty="0"/>
+          </a:p>
+        </p:txBody>
+      </p:sp>
+      <p:sp>
+        <p:nvSpPr>
+          <p:cNvPr id="1027" name="TextBox 1026">
+            <a:extLst>
+              <a:ext uri="{FF2B5EF4-FFF2-40B4-BE49-F238E27FC236}">
+                <a16:creationId xmlns:a16="http://schemas.microsoft.com/office/drawing/2014/main" id="{D368CD8E-CBD4-AE2D-10B0-A448B41628E8}"/>
+              </a:ext>
+            </a:extLst>
+          </p:cNvPr>
+          <p:cNvSpPr txBox="1"/>
+          <p:nvPr/>
+        </p:nvSpPr>
+        <p:spPr>
+          <a:xfrm>
+            <a:off x="10930778" y="5406085"/>
+            <a:ext cx="841256" cy="369332"/>
+          </a:xfrm>
+          <a:prstGeom prst="rect">
+            <a:avLst/>
+          </a:prstGeom>
+          <a:noFill/>
+        </p:spPr>
+        <p:txBody>
+          <a:bodyPr wrap="none" rtlCol="0">
+            <a:spAutoFit/>
+          </a:bodyPr>
+          <a:lstStyle/>
+          <a:p>
+            <a:r>
+              <a:rPr lang="en-US" b="1" dirty="0"/>
+              <a:t>Prio: 2</a:t>
+            </a:r>
+            <a:endParaRPr lang="en-SE" b="1" dirty="0"/>
+          </a:p>
+        </p:txBody>
+      </p:sp>
+      <p:cxnSp>
+        <p:nvCxnSpPr>
+          <p:cNvPr id="1029" name="Straight Connector 1028">
+            <a:extLst>
+              <a:ext uri="{FF2B5EF4-FFF2-40B4-BE49-F238E27FC236}">
+                <a16:creationId xmlns:a16="http://schemas.microsoft.com/office/drawing/2014/main" id="{120DC216-9949-DE24-6D9E-D508B5741AF1}"/>
+              </a:ext>
+            </a:extLst>
+          </p:cNvPr>
+          <p:cNvCxnSpPr>
+            <a:cxnSpLocks/>
+            <a:endCxn id="5" idx="2"/>
+          </p:cNvCxnSpPr>
+          <p:nvPr/>
+        </p:nvCxnSpPr>
+        <p:spPr>
+          <a:xfrm flipH="1" flipV="1">
+            <a:off x="1694867" y="2654805"/>
+            <a:ext cx="971160" cy="402623"/>
+          </a:xfrm>
+          <a:prstGeom prst="line">
+            <a:avLst/>
+          </a:prstGeom>
+          <a:ln w="9525">
+            <a:solidFill>
+              <a:srgbClr val="FF0000"/>
+            </a:solidFill>
+          </a:ln>
+        </p:spPr>
+        <p:style>
+          <a:lnRef idx="2">
+            <a:schemeClr val="accent1"/>
+          </a:lnRef>
+          <a:fillRef idx="0">
+            <a:schemeClr val="accent1"/>
+          </a:fillRef>
+          <a:effectRef idx="1">
+            <a:schemeClr val="accent1"/>
+          </a:effectRef>
+          <a:fontRef idx="minor">
+            <a:schemeClr val="tx1"/>
+          </a:fontRef>
+        </p:style>
+      </p:cxnSp>
+      <p:cxnSp>
+        <p:nvCxnSpPr>
+          <p:cNvPr id="1033" name="Straight Connector 1032">
+            <a:extLst>
+              <a:ext uri="{FF2B5EF4-FFF2-40B4-BE49-F238E27FC236}">
+                <a16:creationId xmlns:a16="http://schemas.microsoft.com/office/drawing/2014/main" id="{DAD59B41-BAAE-24CF-793B-B3F5A73C3951}"/>
+              </a:ext>
+            </a:extLst>
+          </p:cNvPr>
+          <p:cNvCxnSpPr>
+            <a:cxnSpLocks/>
+            <a:endCxn id="5" idx="2"/>
+          </p:cNvCxnSpPr>
+          <p:nvPr/>
+        </p:nvCxnSpPr>
+        <p:spPr>
+          <a:xfrm flipH="1" flipV="1">
+            <a:off x="1694867" y="2654805"/>
+            <a:ext cx="1384348" cy="433316"/>
+          </a:xfrm>
+          <a:prstGeom prst="line">
+            <a:avLst/>
+          </a:prstGeom>
+          <a:ln w="9525">
+            <a:solidFill>
+              <a:srgbClr val="FF0000"/>
+            </a:solidFill>
+          </a:ln>
+        </p:spPr>
+        <p:style>
+          <a:lnRef idx="2">
+            <a:schemeClr val="accent1"/>
+          </a:lnRef>
+          <a:fillRef idx="0">
+            <a:schemeClr val="accent1"/>
+          </a:fillRef>
+          <a:effectRef idx="1">
+            <a:schemeClr val="accent1"/>
+          </a:effectRef>
+          <a:fontRef idx="minor">
+            <a:schemeClr val="tx1"/>
+          </a:fontRef>
+        </p:style>
+      </p:cxnSp>
+      <p:cxnSp>
+        <p:nvCxnSpPr>
+          <p:cNvPr id="1037" name="Straight Connector 1036">
+            <a:extLst>
+              <a:ext uri="{FF2B5EF4-FFF2-40B4-BE49-F238E27FC236}">
+                <a16:creationId xmlns:a16="http://schemas.microsoft.com/office/drawing/2014/main" id="{ED1A721E-7BDA-C997-6D45-F8F9AC848F93}"/>
+              </a:ext>
+            </a:extLst>
+          </p:cNvPr>
+          <p:cNvCxnSpPr>
+            <a:cxnSpLocks/>
+            <a:endCxn id="5" idx="2"/>
+          </p:cNvCxnSpPr>
+          <p:nvPr/>
+        </p:nvCxnSpPr>
+        <p:spPr>
+          <a:xfrm flipH="1" flipV="1">
+            <a:off x="1694867" y="2654805"/>
+            <a:ext cx="1847324" cy="459618"/>
+          </a:xfrm>
+          <a:prstGeom prst="line">
+            <a:avLst/>
+          </a:prstGeom>
+          <a:ln w="9525">
             <a:solidFill>
               <a:srgbClr val="FF0000"/>
             </a:solidFill>
